--- a/Semester 3/OOP/OOP_Week7.pptx
+++ b/Semester 3/OOP/OOP_Week7.pptx
@@ -154,7 +154,7 @@
       </p:grpSpPr>
       <p:sp>
         <p:nvSpPr>
-          <p:cNvPr id="2" name="Header Placeholder 1"/>
+          <p:cNvPr id="1011230401" name="Header Placeholder 1"/>
           <p:cNvSpPr>
             <a:spLocks noGrp="1"/>
           </p:cNvSpPr>
@@ -188,7 +188,7 @@
       </p:sp>
       <p:sp>
         <p:nvSpPr>
-          <p:cNvPr id="3" name="Date Placeholder 2"/>
+          <p:cNvPr id="122069853" name="Date Placeholder 2"/>
           <p:cNvSpPr>
             <a:spLocks noGrp="1"/>
           </p:cNvSpPr>
@@ -222,7 +222,7 @@
       </p:sp>
       <p:sp>
         <p:nvSpPr>
-          <p:cNvPr id="3" name="Date Placeholder 2"/>
+          <p:cNvPr id="1667885475" name="Date Placeholder 2"/>
           <p:cNvSpPr>
             <a:spLocks noGrp="1"/>
           </p:cNvSpPr>
@@ -256,7 +256,7 @@
       </p:sp>
       <p:sp>
         <p:nvSpPr>
-          <p:cNvPr id="5" name="Notes Placeholder 4"/>
+          <p:cNvPr id="1635848783" name="Notes Placeholder 4"/>
           <p:cNvSpPr>
             <a:spLocks noGrp="1"/>
           </p:cNvSpPr>
@@ -286,7 +286,7 @@
       </p:sp>
       <p:sp>
         <p:nvSpPr>
-          <p:cNvPr id="6" name="Footer Placeholder 5"/>
+          <p:cNvPr id="961779634" name="Footer Placeholder 5"/>
           <p:cNvSpPr>
             <a:spLocks noGrp="1"/>
           </p:cNvSpPr>
@@ -320,7 +320,7 @@
       </p:sp>
       <p:sp>
         <p:nvSpPr>
-          <p:cNvPr id="7" name="Slide Number Placeholder 6"/>
+          <p:cNvPr id="1285396220" name="Slide Number Placeholder 6"/>
           <p:cNvSpPr>
             <a:spLocks noGrp="1"/>
           </p:cNvSpPr>
@@ -469,7 +469,7 @@
       </p:grpSpPr>
       <p:sp>
         <p:nvSpPr>
-          <p:cNvPr id="2" name="Slide Image Placeholder 1"/>
+          <p:cNvPr id="1907487904" name="Slide Image Placeholder 1"/>
           <p:cNvSpPr>
             <a:spLocks noChangeAspect="1" noGrp="1" noRot="1"/>
           </p:cNvSpPr>
@@ -481,7 +481,7 @@
       </p:sp>
       <p:sp>
         <p:nvSpPr>
-          <p:cNvPr id="3" name="Notes Placeholder 2"/>
+          <p:cNvPr id="1426634157" name="Notes Placeholder 2"/>
           <p:cNvSpPr>
             <a:spLocks noGrp="1"/>
           </p:cNvSpPr>
@@ -503,7 +503,7 @@
       </p:sp>
       <p:sp>
         <p:nvSpPr>
-          <p:cNvPr id="4" name="Slide Number Placeholder 3"/>
+          <p:cNvPr id="569135234" name="Slide Number Placeholder 3"/>
           <p:cNvSpPr>
             <a:spLocks noGrp="1"/>
           </p:cNvSpPr>
@@ -554,7 +554,7 @@
       </p:grpSpPr>
       <p:sp>
         <p:nvSpPr>
-          <p:cNvPr id="2" name="Slide Image Placeholder 1"/>
+          <p:cNvPr id="1449864243" name="Slide Image Placeholder 1"/>
           <p:cNvSpPr>
             <a:spLocks noChangeAspect="1" noGrp="1" noRot="1"/>
           </p:cNvSpPr>
@@ -566,7 +566,7 @@
       </p:sp>
       <p:sp>
         <p:nvSpPr>
-          <p:cNvPr id="3" name="Notes Placeholder 2"/>
+          <p:cNvPr id="722891069" name="Notes Placeholder 2"/>
           <p:cNvSpPr>
             <a:spLocks noGrp="1"/>
           </p:cNvSpPr>
@@ -588,7 +588,7 @@
       </p:sp>
       <p:sp>
         <p:nvSpPr>
-          <p:cNvPr id="4" name="Slide Number Placeholder 3"/>
+          <p:cNvPr id="1708999613" name="Slide Number Placeholder 3"/>
           <p:cNvSpPr>
             <a:spLocks noGrp="1"/>
           </p:cNvSpPr>
@@ -639,7 +639,7 @@
       </p:grpSpPr>
       <p:sp>
         <p:nvSpPr>
-          <p:cNvPr id="2" name="Slide Image Placeholder 1"/>
+          <p:cNvPr id="1700809143" name="Slide Image Placeholder 1"/>
           <p:cNvSpPr>
             <a:spLocks noChangeAspect="1" noGrp="1" noRot="1"/>
           </p:cNvSpPr>
@@ -651,7 +651,7 @@
       </p:sp>
       <p:sp>
         <p:nvSpPr>
-          <p:cNvPr id="3" name="Notes Placeholder 2"/>
+          <p:cNvPr id="827386496" name="Notes Placeholder 2"/>
           <p:cNvSpPr>
             <a:spLocks noGrp="1"/>
           </p:cNvSpPr>
@@ -673,7 +673,7 @@
       </p:sp>
       <p:sp>
         <p:nvSpPr>
-          <p:cNvPr id="4" name="Slide Number Placeholder 3"/>
+          <p:cNvPr id="2088306768" name="Slide Number Placeholder 3"/>
           <p:cNvSpPr>
             <a:spLocks noGrp="1"/>
           </p:cNvSpPr>
@@ -724,7 +724,7 @@
       </p:grpSpPr>
       <p:sp>
         <p:nvSpPr>
-          <p:cNvPr id="2" name="Slide Image Placeholder 1"/>
+          <p:cNvPr id="1089819096" name="Slide Image Placeholder 1"/>
           <p:cNvSpPr>
             <a:spLocks noChangeAspect="1" noGrp="1" noRot="1"/>
           </p:cNvSpPr>
@@ -736,7 +736,7 @@
       </p:sp>
       <p:sp>
         <p:nvSpPr>
-          <p:cNvPr id="3" name="Notes Placeholder 2"/>
+          <p:cNvPr id="1345405908" name="Notes Placeholder 2"/>
           <p:cNvSpPr>
             <a:spLocks noGrp="1"/>
           </p:cNvSpPr>
@@ -758,7 +758,7 @@
       </p:sp>
       <p:sp>
         <p:nvSpPr>
-          <p:cNvPr id="4" name="Slide Number Placeholder 3"/>
+          <p:cNvPr id="248485144" name="Slide Number Placeholder 3"/>
           <p:cNvSpPr>
             <a:spLocks noGrp="1"/>
           </p:cNvSpPr>
@@ -809,7 +809,7 @@
       </p:grpSpPr>
       <p:sp>
         <p:nvSpPr>
-          <p:cNvPr id="2" name="Slide Image Placeholder 1"/>
+          <p:cNvPr id="1625212361" name="Slide Image Placeholder 1"/>
           <p:cNvSpPr>
             <a:spLocks noChangeAspect="1" noGrp="1" noRot="1"/>
           </p:cNvSpPr>
@@ -821,7 +821,7 @@
       </p:sp>
       <p:sp>
         <p:nvSpPr>
-          <p:cNvPr id="3" name="Notes Placeholder 2"/>
+          <p:cNvPr id="1871741847" name="Notes Placeholder 2"/>
           <p:cNvSpPr>
             <a:spLocks noGrp="1"/>
           </p:cNvSpPr>
@@ -843,7 +843,7 @@
       </p:sp>
       <p:sp>
         <p:nvSpPr>
-          <p:cNvPr id="4" name="Slide Number Placeholder 3"/>
+          <p:cNvPr id="412439216" name="Slide Number Placeholder 3"/>
           <p:cNvSpPr>
             <a:spLocks noGrp="1"/>
           </p:cNvSpPr>
@@ -894,7 +894,7 @@
       </p:grpSpPr>
       <p:sp>
         <p:nvSpPr>
-          <p:cNvPr id="2" name="Slide Image Placeholder 1"/>
+          <p:cNvPr id="1206833443" name="Slide Image Placeholder 1"/>
           <p:cNvSpPr>
             <a:spLocks noChangeAspect="1" noGrp="1" noRot="1"/>
           </p:cNvSpPr>
@@ -906,7 +906,7 @@
       </p:sp>
       <p:sp>
         <p:nvSpPr>
-          <p:cNvPr id="3" name="Notes Placeholder 2"/>
+          <p:cNvPr id="452453553" name="Notes Placeholder 2"/>
           <p:cNvSpPr>
             <a:spLocks noGrp="1"/>
           </p:cNvSpPr>
@@ -928,7 +928,7 @@
       </p:sp>
       <p:sp>
         <p:nvSpPr>
-          <p:cNvPr id="4" name="Slide Number Placeholder 3"/>
+          <p:cNvPr id="1411164852" name="Slide Number Placeholder 3"/>
           <p:cNvSpPr>
             <a:spLocks noGrp="1"/>
           </p:cNvSpPr>
@@ -979,7 +979,7 @@
       </p:grpSpPr>
       <p:sp>
         <p:nvSpPr>
-          <p:cNvPr id="2" name="Slide Image Placeholder 1"/>
+          <p:cNvPr id="1960489357" name="Slide Image Placeholder 1"/>
           <p:cNvSpPr>
             <a:spLocks noChangeAspect="1" noGrp="1" noRot="1"/>
           </p:cNvSpPr>
@@ -991,7 +991,7 @@
       </p:sp>
       <p:sp>
         <p:nvSpPr>
-          <p:cNvPr id="3" name="Notes Placeholder 2"/>
+          <p:cNvPr id="358905619" name="Notes Placeholder 2"/>
           <p:cNvSpPr>
             <a:spLocks noGrp="1"/>
           </p:cNvSpPr>
@@ -1013,7 +1013,7 @@
       </p:sp>
       <p:sp>
         <p:nvSpPr>
-          <p:cNvPr id="4" name="Slide Number Placeholder 3"/>
+          <p:cNvPr id="29446538" name="Slide Number Placeholder 3"/>
           <p:cNvSpPr>
             <a:spLocks noGrp="1"/>
           </p:cNvSpPr>
@@ -1064,7 +1064,7 @@
       </p:grpSpPr>
       <p:sp>
         <p:nvSpPr>
-          <p:cNvPr id="2" name="Slide Image Placeholder 1"/>
+          <p:cNvPr id="1051292303" name="Slide Image Placeholder 1"/>
           <p:cNvSpPr>
             <a:spLocks noChangeAspect="1" noGrp="1" noRot="1"/>
           </p:cNvSpPr>
@@ -1076,7 +1076,7 @@
       </p:sp>
       <p:sp>
         <p:nvSpPr>
-          <p:cNvPr id="3" name="Notes Placeholder 2"/>
+          <p:cNvPr id="5888205" name="Notes Placeholder 2"/>
           <p:cNvSpPr>
             <a:spLocks noGrp="1"/>
           </p:cNvSpPr>
@@ -1098,7 +1098,7 @@
       </p:sp>
       <p:sp>
         <p:nvSpPr>
-          <p:cNvPr id="4" name="Slide Number Placeholder 3"/>
+          <p:cNvPr id="1489786372" name="Slide Number Placeholder 3"/>
           <p:cNvSpPr>
             <a:spLocks noGrp="1"/>
           </p:cNvSpPr>
@@ -1149,7 +1149,7 @@
       </p:grpSpPr>
       <p:sp>
         <p:nvSpPr>
-          <p:cNvPr id="2" name="Slide Image Placeholder 1"/>
+          <p:cNvPr id="1083908508" name="Slide Image Placeholder 1"/>
           <p:cNvSpPr>
             <a:spLocks noChangeAspect="1" noGrp="1" noRot="1"/>
           </p:cNvSpPr>
@@ -1161,7 +1161,7 @@
       </p:sp>
       <p:sp>
         <p:nvSpPr>
-          <p:cNvPr id="3" name="Notes Placeholder 2"/>
+          <p:cNvPr id="1268293190" name="Notes Placeholder 2"/>
           <p:cNvSpPr>
             <a:spLocks noGrp="1"/>
           </p:cNvSpPr>
@@ -1183,7 +1183,7 @@
       </p:sp>
       <p:sp>
         <p:nvSpPr>
-          <p:cNvPr id="4" name="Slide Number Placeholder 3"/>
+          <p:cNvPr id="684831125" name="Slide Number Placeholder 3"/>
           <p:cNvSpPr>
             <a:spLocks noGrp="1"/>
           </p:cNvSpPr>
@@ -1234,7 +1234,7 @@
       </p:grpSpPr>
       <p:sp>
         <p:nvSpPr>
-          <p:cNvPr id="2" name="Slide Image Placeholder 1"/>
+          <p:cNvPr id="2138699641" name="Slide Image Placeholder 1"/>
           <p:cNvSpPr>
             <a:spLocks noChangeAspect="1" noGrp="1" noRot="1"/>
           </p:cNvSpPr>
@@ -1246,7 +1246,7 @@
       </p:sp>
       <p:sp>
         <p:nvSpPr>
-          <p:cNvPr id="3" name="Notes Placeholder 2"/>
+          <p:cNvPr id="1270035821" name="Notes Placeholder 2"/>
           <p:cNvSpPr>
             <a:spLocks noGrp="1"/>
           </p:cNvSpPr>
@@ -1268,7 +1268,7 @@
       </p:sp>
       <p:sp>
         <p:nvSpPr>
-          <p:cNvPr id="4" name="Slide Number Placeholder 3"/>
+          <p:cNvPr id="176648676" name="Slide Number Placeholder 3"/>
           <p:cNvSpPr>
             <a:spLocks noGrp="1"/>
           </p:cNvSpPr>
@@ -1319,7 +1319,7 @@
       </p:grpSpPr>
       <p:sp>
         <p:nvSpPr>
-          <p:cNvPr id="2" name="Slide Image Placeholder 1"/>
+          <p:cNvPr id="185996359" name="Slide Image Placeholder 1"/>
           <p:cNvSpPr>
             <a:spLocks noChangeAspect="1" noGrp="1" noRot="1"/>
           </p:cNvSpPr>
@@ -1331,7 +1331,7 @@
       </p:sp>
       <p:sp>
         <p:nvSpPr>
-          <p:cNvPr id="3" name="Notes Placeholder 2"/>
+          <p:cNvPr id="1337647717" name="Notes Placeholder 2"/>
           <p:cNvSpPr>
             <a:spLocks noGrp="1"/>
           </p:cNvSpPr>
@@ -1353,7 +1353,7 @@
       </p:sp>
       <p:sp>
         <p:nvSpPr>
-          <p:cNvPr id="4" name="Slide Number Placeholder 3"/>
+          <p:cNvPr id="1701473128" name="Slide Number Placeholder 3"/>
           <p:cNvSpPr>
             <a:spLocks noGrp="1"/>
           </p:cNvSpPr>
@@ -1404,7 +1404,7 @@
       </p:grpSpPr>
       <p:sp>
         <p:nvSpPr>
-          <p:cNvPr id="2" name="Slide Image Placeholder 1"/>
+          <p:cNvPr id="608365378" name="Slide Image Placeholder 1"/>
           <p:cNvSpPr>
             <a:spLocks noChangeAspect="1" noGrp="1" noRot="1"/>
           </p:cNvSpPr>
@@ -1416,7 +1416,7 @@
       </p:sp>
       <p:sp>
         <p:nvSpPr>
-          <p:cNvPr id="3" name="Notes Placeholder 2"/>
+          <p:cNvPr id="1792596524" name="Notes Placeholder 2"/>
           <p:cNvSpPr>
             <a:spLocks noGrp="1"/>
           </p:cNvSpPr>
@@ -1438,7 +1438,7 @@
       </p:sp>
       <p:sp>
         <p:nvSpPr>
-          <p:cNvPr id="4" name="Slide Number Placeholder 3"/>
+          <p:cNvPr id="2082459349" name="Slide Number Placeholder 3"/>
           <p:cNvSpPr>
             <a:spLocks noGrp="1"/>
           </p:cNvSpPr>
@@ -1489,7 +1489,7 @@
       </p:grpSpPr>
       <p:sp>
         <p:nvSpPr>
-          <p:cNvPr id="2" name="Slide Image Placeholder 1"/>
+          <p:cNvPr id="1938697869" name="Slide Image Placeholder 1"/>
           <p:cNvSpPr>
             <a:spLocks noChangeAspect="1" noGrp="1" noRot="1"/>
           </p:cNvSpPr>
@@ -1501,7 +1501,7 @@
       </p:sp>
       <p:sp>
         <p:nvSpPr>
-          <p:cNvPr id="3" name="Notes Placeholder 2"/>
+          <p:cNvPr id="112401869" name="Notes Placeholder 2"/>
           <p:cNvSpPr>
             <a:spLocks noGrp="1"/>
           </p:cNvSpPr>
@@ -1523,7 +1523,7 @@
       </p:sp>
       <p:sp>
         <p:nvSpPr>
-          <p:cNvPr id="4" name="Slide Number Placeholder 3"/>
+          <p:cNvPr id="985853438" name="Slide Number Placeholder 3"/>
           <p:cNvSpPr>
             <a:spLocks noGrp="1"/>
           </p:cNvSpPr>
@@ -1574,7 +1574,7 @@
       </p:grpSpPr>
       <p:sp>
         <p:nvSpPr>
-          <p:cNvPr id="2" name="Slide Image Placeholder 1"/>
+          <p:cNvPr id="707865869" name="Slide Image Placeholder 1"/>
           <p:cNvSpPr>
             <a:spLocks noChangeAspect="1" noGrp="1" noRot="1"/>
           </p:cNvSpPr>
@@ -1586,7 +1586,7 @@
       </p:sp>
       <p:sp>
         <p:nvSpPr>
-          <p:cNvPr id="3" name="Notes Placeholder 2"/>
+          <p:cNvPr id="1619324433" name="Notes Placeholder 2"/>
           <p:cNvSpPr>
             <a:spLocks noGrp="1"/>
           </p:cNvSpPr>
@@ -1608,7 +1608,7 @@
       </p:sp>
       <p:sp>
         <p:nvSpPr>
-          <p:cNvPr id="4" name="Slide Number Placeholder 3"/>
+          <p:cNvPr id="2059227943" name="Slide Number Placeholder 3"/>
           <p:cNvSpPr>
             <a:spLocks noGrp="1"/>
           </p:cNvSpPr>
@@ -1659,7 +1659,7 @@
       </p:grpSpPr>
       <p:sp>
         <p:nvSpPr>
-          <p:cNvPr id="2" name="Slide Image Placeholder 1"/>
+          <p:cNvPr id="220491665" name="Slide Image Placeholder 1"/>
           <p:cNvSpPr>
             <a:spLocks noChangeAspect="1" noGrp="1" noRot="1"/>
           </p:cNvSpPr>
@@ -1671,7 +1671,7 @@
       </p:sp>
       <p:sp>
         <p:nvSpPr>
-          <p:cNvPr id="3" name="Notes Placeholder 2"/>
+          <p:cNvPr id="1700214914" name="Notes Placeholder 2"/>
           <p:cNvSpPr>
             <a:spLocks noGrp="1"/>
           </p:cNvSpPr>
@@ -1693,7 +1693,7 @@
       </p:sp>
       <p:sp>
         <p:nvSpPr>
-          <p:cNvPr id="4" name="Slide Number Placeholder 3"/>
+          <p:cNvPr id="286154906" name="Slide Number Placeholder 3"/>
           <p:cNvSpPr>
             <a:spLocks noGrp="1"/>
           </p:cNvSpPr>
@@ -1744,7 +1744,7 @@
       </p:grpSpPr>
       <p:sp>
         <p:nvSpPr>
-          <p:cNvPr id="2" name="Slide Image Placeholder 1"/>
+          <p:cNvPr id="204289309" name="Slide Image Placeholder 1"/>
           <p:cNvSpPr>
             <a:spLocks noChangeAspect="1" noGrp="1" noRot="1"/>
           </p:cNvSpPr>
@@ -1756,7 +1756,7 @@
       </p:sp>
       <p:sp>
         <p:nvSpPr>
-          <p:cNvPr id="3" name="Notes Placeholder 2"/>
+          <p:cNvPr id="453891476" name="Notes Placeholder 2"/>
           <p:cNvSpPr>
             <a:spLocks noGrp="1"/>
           </p:cNvSpPr>
@@ -1778,7 +1778,7 @@
       </p:sp>
       <p:sp>
         <p:nvSpPr>
-          <p:cNvPr id="4" name="Slide Number Placeholder 3"/>
+          <p:cNvPr id="1844822458" name="Slide Number Placeholder 3"/>
           <p:cNvSpPr>
             <a:spLocks noGrp="1"/>
           </p:cNvSpPr>
@@ -1829,7 +1829,7 @@
       </p:grpSpPr>
       <p:sp>
         <p:nvSpPr>
-          <p:cNvPr id="2" name="Slide Image Placeholder 1"/>
+          <p:cNvPr id="1876219072" name="Slide Image Placeholder 1"/>
           <p:cNvSpPr>
             <a:spLocks noChangeAspect="1" noGrp="1" noRot="1"/>
           </p:cNvSpPr>
@@ -1841,7 +1841,7 @@
       </p:sp>
       <p:sp>
         <p:nvSpPr>
-          <p:cNvPr id="3" name="Notes Placeholder 2"/>
+          <p:cNvPr id="1498797366" name="Notes Placeholder 2"/>
           <p:cNvSpPr>
             <a:spLocks noGrp="1"/>
           </p:cNvSpPr>
@@ -1863,7 +1863,7 @@
       </p:sp>
       <p:sp>
         <p:nvSpPr>
-          <p:cNvPr id="4" name="Slide Number Placeholder 3"/>
+          <p:cNvPr id="110420914" name="Slide Number Placeholder 3"/>
           <p:cNvSpPr>
             <a:spLocks noGrp="1"/>
           </p:cNvSpPr>
@@ -1914,7 +1914,7 @@
       </p:grpSpPr>
       <p:sp>
         <p:nvSpPr>
-          <p:cNvPr id="2" name="Slide Image Placeholder 1"/>
+          <p:cNvPr id="1673949081" name="Slide Image Placeholder 1"/>
           <p:cNvSpPr>
             <a:spLocks noChangeAspect="1" noGrp="1" noRot="1"/>
           </p:cNvSpPr>
@@ -1926,7 +1926,7 @@
       </p:sp>
       <p:sp>
         <p:nvSpPr>
-          <p:cNvPr id="3" name="Notes Placeholder 2"/>
+          <p:cNvPr id="1833274277" name="Notes Placeholder 2"/>
           <p:cNvSpPr>
             <a:spLocks noGrp="1"/>
           </p:cNvSpPr>
@@ -1948,7 +1948,7 @@
       </p:sp>
       <p:sp>
         <p:nvSpPr>
-          <p:cNvPr id="4" name="Slide Number Placeholder 3"/>
+          <p:cNvPr id="1998388752" name="Slide Number Placeholder 3"/>
           <p:cNvSpPr>
             <a:spLocks noGrp="1"/>
           </p:cNvSpPr>
@@ -1999,7 +1999,7 @@
       </p:grpSpPr>
       <p:sp>
         <p:nvSpPr>
-          <p:cNvPr id="2" name="Slide Image Placeholder 1"/>
+          <p:cNvPr id="376663378" name="Slide Image Placeholder 1"/>
           <p:cNvSpPr>
             <a:spLocks noChangeAspect="1" noGrp="1" noRot="1"/>
           </p:cNvSpPr>
@@ -2011,7 +2011,7 @@
       </p:sp>
       <p:sp>
         <p:nvSpPr>
-          <p:cNvPr id="3" name="Notes Placeholder 2"/>
+          <p:cNvPr id="1362043217" name="Notes Placeholder 2"/>
           <p:cNvSpPr>
             <a:spLocks noGrp="1"/>
           </p:cNvSpPr>
@@ -2033,7 +2033,7 @@
       </p:sp>
       <p:sp>
         <p:nvSpPr>
-          <p:cNvPr id="4" name="Slide Number Placeholder 3"/>
+          <p:cNvPr id="987412974" name="Slide Number Placeholder 3"/>
           <p:cNvSpPr>
             <a:spLocks noGrp="1"/>
           </p:cNvSpPr>
@@ -2084,7 +2084,7 @@
       </p:grpSpPr>
       <p:sp>
         <p:nvSpPr>
-          <p:cNvPr id="2" name="Slide Image Placeholder 1"/>
+          <p:cNvPr id="538490528" name="Slide Image Placeholder 1"/>
           <p:cNvSpPr>
             <a:spLocks noChangeAspect="1" noGrp="1" noRot="1"/>
           </p:cNvSpPr>
@@ -2096,7 +2096,7 @@
       </p:sp>
       <p:sp>
         <p:nvSpPr>
-          <p:cNvPr id="3" name="Notes Placeholder 2"/>
+          <p:cNvPr id="870197139" name="Notes Placeholder 2"/>
           <p:cNvSpPr>
             <a:spLocks noGrp="1"/>
           </p:cNvSpPr>
@@ -2118,7 +2118,7 @@
       </p:sp>
       <p:sp>
         <p:nvSpPr>
-          <p:cNvPr id="4" name="Slide Number Placeholder 3"/>
+          <p:cNvPr id="1240891778" name="Slide Number Placeholder 3"/>
           <p:cNvSpPr>
             <a:spLocks noGrp="1"/>
           </p:cNvSpPr>
@@ -2169,7 +2169,7 @@
       </p:grpSpPr>
       <p:sp>
         <p:nvSpPr>
-          <p:cNvPr id="2" name="Slide Image Placeholder 1"/>
+          <p:cNvPr id="18984113" name="Slide Image Placeholder 1"/>
           <p:cNvSpPr>
             <a:spLocks noChangeAspect="1" noGrp="1" noRot="1"/>
           </p:cNvSpPr>
@@ -2181,7 +2181,7 @@
       </p:sp>
       <p:sp>
         <p:nvSpPr>
-          <p:cNvPr id="3" name="Notes Placeholder 2"/>
+          <p:cNvPr id="985546081" name="Notes Placeholder 2"/>
           <p:cNvSpPr>
             <a:spLocks noGrp="1"/>
           </p:cNvSpPr>
@@ -2203,7 +2203,7 @@
       </p:sp>
       <p:sp>
         <p:nvSpPr>
-          <p:cNvPr id="4" name="Slide Number Placeholder 3"/>
+          <p:cNvPr id="783349324" name="Slide Number Placeholder 3"/>
           <p:cNvSpPr>
             <a:spLocks noGrp="1"/>
           </p:cNvSpPr>
@@ -2261,7 +2261,7 @@
       </p:grpSpPr>
       <p:sp>
         <p:nvSpPr>
-          <p:cNvPr id="874255480" name="bg object 16"/>
+          <p:cNvPr id="442228184" name="bg object 16"/>
           <p:cNvSpPr/>
           <p:nvPr/>
         </p:nvSpPr>
@@ -2314,7 +2314,7 @@
       </p:sp>
       <p:sp>
         <p:nvSpPr>
-          <p:cNvPr id="1194350811" name="bg object 17"/>
+          <p:cNvPr id="1604768224" name="bg object 17"/>
           <p:cNvSpPr/>
           <p:nvPr/>
         </p:nvSpPr>
@@ -2367,7 +2367,7 @@
       </p:sp>
       <p:sp>
         <p:nvSpPr>
-          <p:cNvPr id="1634338507" name="bg object 18"/>
+          <p:cNvPr id="72277905" name="bg object 18"/>
           <p:cNvSpPr/>
           <p:nvPr/>
         </p:nvSpPr>
@@ -3359,7 +3359,7 @@
       </p:sp>
       <p:sp>
         <p:nvSpPr>
-          <p:cNvPr id="2071587766" name="bg object 19"/>
+          <p:cNvPr id="45317415" name="bg object 19"/>
           <p:cNvSpPr/>
           <p:nvPr/>
         </p:nvSpPr>
@@ -4107,7 +4107,7 @@
       </p:sp>
       <p:sp>
         <p:nvSpPr>
-          <p:cNvPr id="1979666792" name="Holder 2"/>
+          <p:cNvPr id="1966242989" name="Holder 2"/>
           <p:cNvSpPr>
             <a:spLocks noGrp="1"/>
           </p:cNvSpPr>
@@ -4149,7 +4149,7 @@
       </p:sp>
       <p:sp>
         <p:nvSpPr>
-          <p:cNvPr id="1616782666" name="Holder 3"/>
+          <p:cNvPr id="1319983117" name="Holder 3"/>
           <p:cNvSpPr>
             <a:spLocks noGrp="1"/>
           </p:cNvSpPr>
@@ -4185,7 +4185,7 @@
       </p:sp>
       <p:sp>
         <p:nvSpPr>
-          <p:cNvPr id="1708354282" name="Holder 4"/>
+          <p:cNvPr id="2035771749" name="Holder 4"/>
           <p:cNvSpPr>
             <a:spLocks noGrp="1"/>
           </p:cNvSpPr>
@@ -4217,7 +4217,7 @@
       </p:sp>
       <p:sp>
         <p:nvSpPr>
-          <p:cNvPr id="1770086780" name="Holder 5"/>
+          <p:cNvPr id="1552970439" name="Holder 5"/>
           <p:cNvSpPr>
             <a:spLocks noGrp="1"/>
           </p:cNvSpPr>
@@ -4253,7 +4253,7 @@
       </p:sp>
       <p:sp>
         <p:nvSpPr>
-          <p:cNvPr id="1984942565" name="Holder 6"/>
+          <p:cNvPr id="1592045443" name="Holder 6"/>
           <p:cNvSpPr>
             <a:spLocks noGrp="1"/>
           </p:cNvSpPr>
@@ -4321,7 +4321,7 @@
       </p:grpSpPr>
       <p:sp>
         <p:nvSpPr>
-          <p:cNvPr id="237733883" name="bg object 16"/>
+          <p:cNvPr id="346061128" name="bg object 16"/>
           <p:cNvSpPr/>
           <p:nvPr/>
         </p:nvSpPr>
@@ -4374,7 +4374,7 @@
       </p:sp>
       <p:sp>
         <p:nvSpPr>
-          <p:cNvPr id="1663468879" name="bg object 17"/>
+          <p:cNvPr id="1675935988" name="bg object 17"/>
           <p:cNvSpPr/>
           <p:nvPr/>
         </p:nvSpPr>
@@ -4427,7 +4427,7 @@
       </p:sp>
       <p:sp>
         <p:nvSpPr>
-          <p:cNvPr id="847216806" name="bg object 18"/>
+          <p:cNvPr id="588552861" name="bg object 18"/>
           <p:cNvSpPr/>
           <p:nvPr/>
         </p:nvSpPr>
@@ -4480,7 +4480,7 @@
       </p:sp>
       <p:sp>
         <p:nvSpPr>
-          <p:cNvPr id="224921274" name="bg object 19"/>
+          <p:cNvPr id="570401217" name="bg object 19"/>
           <p:cNvSpPr/>
           <p:nvPr/>
         </p:nvSpPr>
@@ -4533,7 +4533,7 @@
       </p:sp>
       <p:sp>
         <p:nvSpPr>
-          <p:cNvPr id="1113069473" name="bg object 20"/>
+          <p:cNvPr id="1961420426" name="bg object 20"/>
           <p:cNvSpPr/>
           <p:nvPr/>
         </p:nvSpPr>
@@ -4583,7 +4583,7 @@
       </p:sp>
       <p:sp>
         <p:nvSpPr>
-          <p:cNvPr id="739727153" name="Holder 2"/>
+          <p:cNvPr id="735977213" name="Holder 2"/>
           <p:cNvSpPr>
             <a:spLocks noGrp="1"/>
           </p:cNvSpPr>
@@ -4615,7 +4615,7 @@
       </p:sp>
       <p:sp>
         <p:nvSpPr>
-          <p:cNvPr id="1951528417" name="Holder 3"/>
+          <p:cNvPr id="1016604753" name="Holder 3"/>
           <p:cNvSpPr>
             <a:spLocks noGrp="1"/>
           </p:cNvSpPr>
@@ -4647,7 +4647,7 @@
       </p:sp>
       <p:sp>
         <p:nvSpPr>
-          <p:cNvPr id="101543413" name="Holder 4"/>
+          <p:cNvPr id="1790262616" name="Holder 4"/>
           <p:cNvSpPr>
             <a:spLocks noGrp="1"/>
           </p:cNvSpPr>
@@ -4679,7 +4679,7 @@
       </p:sp>
       <p:sp>
         <p:nvSpPr>
-          <p:cNvPr id="2123641003" name="Holder 5"/>
+          <p:cNvPr id="2049376135" name="Holder 5"/>
           <p:cNvSpPr>
             <a:spLocks noGrp="1"/>
           </p:cNvSpPr>
@@ -4715,7 +4715,7 @@
       </p:sp>
       <p:sp>
         <p:nvSpPr>
-          <p:cNvPr id="1424982776" name="Holder 6"/>
+          <p:cNvPr id="1219628462" name="Holder 6"/>
           <p:cNvSpPr>
             <a:spLocks noGrp="1"/>
           </p:cNvSpPr>
@@ -4783,7 +4783,7 @@
       </p:grpSpPr>
       <p:sp>
         <p:nvSpPr>
-          <p:cNvPr id="341237309" name="bg object 16"/>
+          <p:cNvPr id="1465350277" name="bg object 16"/>
           <p:cNvSpPr/>
           <p:nvPr/>
         </p:nvSpPr>
@@ -4836,7 +4836,7 @@
       </p:sp>
       <p:pic>
         <p:nvPicPr>
-          <p:cNvPr id="523842130" name="bg object 17"/>
+          <p:cNvPr id="792274231" name="bg object 17"/>
           <p:cNvPicPr/>
           <p:nvPr/>
         </p:nvPicPr>
@@ -4856,7 +4856,7 @@
       </p:pic>
       <p:pic>
         <p:nvPicPr>
-          <p:cNvPr id="2120342447" name="bg object 18"/>
+          <p:cNvPr id="1865362930" name="bg object 18"/>
           <p:cNvPicPr/>
           <p:nvPr/>
         </p:nvPicPr>
@@ -4876,7 +4876,7 @@
       </p:pic>
       <p:sp>
         <p:nvSpPr>
-          <p:cNvPr id="1048080838" name="Holder 2"/>
+          <p:cNvPr id="725047027" name="Holder 2"/>
           <p:cNvSpPr>
             <a:spLocks noGrp="1"/>
           </p:cNvSpPr>
@@ -4908,7 +4908,7 @@
       </p:sp>
       <p:sp>
         <p:nvSpPr>
-          <p:cNvPr id="1421861691" name="Holder 3"/>
+          <p:cNvPr id="998598059" name="Holder 3"/>
           <p:cNvSpPr>
             <a:spLocks noGrp="1"/>
           </p:cNvSpPr>
@@ -4944,7 +4944,7 @@
       </p:sp>
       <p:sp>
         <p:nvSpPr>
-          <p:cNvPr id="1802975782" name="Holder 4"/>
+          <p:cNvPr id="230524514" name="Holder 4"/>
           <p:cNvSpPr>
             <a:spLocks noGrp="1"/>
           </p:cNvSpPr>
@@ -4980,7 +4980,7 @@
       </p:sp>
       <p:sp>
         <p:nvSpPr>
-          <p:cNvPr id="41098415" name="Holder 5"/>
+          <p:cNvPr id="245426505" name="Holder 5"/>
           <p:cNvSpPr>
             <a:spLocks noGrp="1"/>
           </p:cNvSpPr>
@@ -5012,7 +5012,7 @@
       </p:sp>
       <p:sp>
         <p:nvSpPr>
-          <p:cNvPr id="1885287361" name="Holder 6"/>
+          <p:cNvPr id="1335320686" name="Holder 6"/>
           <p:cNvSpPr>
             <a:spLocks noGrp="1"/>
           </p:cNvSpPr>
@@ -5048,7 +5048,7 @@
       </p:sp>
       <p:sp>
         <p:nvSpPr>
-          <p:cNvPr id="1977289600" name="Holder 7"/>
+          <p:cNvPr id="1774661186" name="Holder 7"/>
           <p:cNvSpPr>
             <a:spLocks noGrp="1"/>
           </p:cNvSpPr>
@@ -5109,7 +5109,7 @@
       </p:grpSpPr>
       <p:sp>
         <p:nvSpPr>
-          <p:cNvPr id="1117880383" name="Holder 2"/>
+          <p:cNvPr id="123211891" name="Holder 2"/>
           <p:cNvSpPr>
             <a:spLocks noGrp="1"/>
           </p:cNvSpPr>
@@ -5141,7 +5141,7 @@
       </p:sp>
       <p:sp>
         <p:nvSpPr>
-          <p:cNvPr id="694305268" name="Holder 3"/>
+          <p:cNvPr id="953229554" name="Holder 3"/>
           <p:cNvSpPr>
             <a:spLocks noGrp="1"/>
           </p:cNvSpPr>
@@ -5173,7 +5173,7 @@
       </p:sp>
       <p:sp>
         <p:nvSpPr>
-          <p:cNvPr id="371900410" name="Holder 4"/>
+          <p:cNvPr id="168538440" name="Holder 4"/>
           <p:cNvSpPr>
             <a:spLocks noGrp="1"/>
           </p:cNvSpPr>
@@ -5209,7 +5209,7 @@
       </p:sp>
       <p:sp>
         <p:nvSpPr>
-          <p:cNvPr id="969722141" name="Holder 5"/>
+          <p:cNvPr id="873112938" name="Holder 5"/>
           <p:cNvSpPr>
             <a:spLocks noGrp="1"/>
           </p:cNvSpPr>
@@ -5277,7 +5277,7 @@
       </p:grpSpPr>
       <p:sp>
         <p:nvSpPr>
-          <p:cNvPr id="1794039953" name="bg object 16"/>
+          <p:cNvPr id="330294080" name="bg object 16"/>
           <p:cNvSpPr/>
           <p:nvPr/>
         </p:nvSpPr>
@@ -5330,7 +5330,7 @@
       </p:sp>
       <p:pic>
         <p:nvPicPr>
-          <p:cNvPr id="228985385" name="bg object 17"/>
+          <p:cNvPr id="718085120" name="bg object 17"/>
           <p:cNvPicPr/>
           <p:nvPr/>
         </p:nvPicPr>
@@ -5350,7 +5350,7 @@
       </p:pic>
       <p:sp>
         <p:nvSpPr>
-          <p:cNvPr id="591524529" name="Holder 2"/>
+          <p:cNvPr id="1898343729" name="Holder 2"/>
           <p:cNvSpPr>
             <a:spLocks noGrp="1"/>
           </p:cNvSpPr>
@@ -5382,7 +5382,7 @@
       </p:sp>
       <p:sp>
         <p:nvSpPr>
-          <p:cNvPr id="1991699064" name="Holder 3"/>
+          <p:cNvPr id="156721246" name="Holder 3"/>
           <p:cNvSpPr>
             <a:spLocks noGrp="1"/>
           </p:cNvSpPr>
@@ -5418,7 +5418,7 @@
       </p:sp>
       <p:sp>
         <p:nvSpPr>
-          <p:cNvPr id="1688901827" name="Holder 4"/>
+          <p:cNvPr id="1335686582" name="Holder 4"/>
           <p:cNvSpPr>
             <a:spLocks noGrp="1"/>
           </p:cNvSpPr>
@@ -5486,7 +5486,7 @@
       </p:grpSpPr>
       <p:sp>
         <p:nvSpPr>
-          <p:cNvPr id="464089106" name="bg object 16"/>
+          <p:cNvPr id="943850464" name="bg object 16"/>
           <p:cNvSpPr/>
           <p:nvPr/>
         </p:nvSpPr>
@@ -5539,7 +5539,7 @@
       </p:sp>
       <p:sp>
         <p:nvSpPr>
-          <p:cNvPr id="196018981" name="Holder 2"/>
+          <p:cNvPr id="1360524539" name="Holder 2"/>
           <p:cNvSpPr>
             <a:spLocks noGrp="1"/>
           </p:cNvSpPr>
@@ -5581,7 +5581,7 @@
       </p:sp>
       <p:sp>
         <p:nvSpPr>
-          <p:cNvPr id="716065604" name="Holder 3"/>
+          <p:cNvPr id="1160997079" name="Holder 3"/>
           <p:cNvSpPr>
             <a:spLocks noGrp="1"/>
           </p:cNvSpPr>
@@ -5623,7 +5623,7 @@
       </p:sp>
       <p:sp>
         <p:nvSpPr>
-          <p:cNvPr id="694687791" name="Holder 4"/>
+          <p:cNvPr id="1958434403" name="Holder 4"/>
           <p:cNvSpPr>
             <a:spLocks noGrp="1"/>
           </p:cNvSpPr>
@@ -5665,7 +5665,7 @@
       </p:sp>
       <p:sp>
         <p:nvSpPr>
-          <p:cNvPr id="720180616" name="Holder 5"/>
+          <p:cNvPr id="212302289" name="Holder 5"/>
           <p:cNvSpPr>
             <a:spLocks noGrp="1"/>
           </p:cNvSpPr>
@@ -5711,7 +5711,7 @@
       </p:sp>
       <p:sp>
         <p:nvSpPr>
-          <p:cNvPr id="2079520557" name="Holder 6"/>
+          <p:cNvPr id="241583141" name="Holder 6"/>
           <p:cNvSpPr>
             <a:spLocks noGrp="1"/>
           </p:cNvSpPr>
@@ -5928,7 +5928,7 @@
       </p:grpSpPr>
       <p:sp>
         <p:nvSpPr>
-          <p:cNvPr id="1794770216" name="object 2"/>
+          <p:cNvPr id="1057040387" name="object 2"/>
           <p:cNvSpPr/>
           <p:nvPr/>
         </p:nvSpPr>
@@ -5981,7 +5981,7 @@
       </p:sp>
       <p:grpSp>
         <p:nvGrpSpPr>
-          <p:cNvPr id="33973379" name="object 3"/>
+          <p:cNvPr id="574395118" name="object 3"/>
           <p:cNvGrpSpPr/>
           <p:nvPr/>
         </p:nvGrpSpPr>
@@ -7789,7 +7789,7 @@
       </p:grpSp>
       <p:sp>
         <p:nvSpPr>
-          <p:cNvPr id="657802158" name="object 7"/>
+          <p:cNvPr id="2046293095" name="object 7"/>
           <p:cNvSpPr txBox="1">
             <a:spLocks noGrp="1"/>
           </p:cNvSpPr>
@@ -7840,7 +7840,7 @@
       </p:sp>
       <p:sp>
         <p:nvSpPr>
-          <p:cNvPr id="1219213806" name="object 8"/>
+          <p:cNvPr id="25739986" name="object 8"/>
           <p:cNvSpPr txBox="1"/>
           <p:nvPr/>
         </p:nvSpPr>
@@ -7920,7 +7920,7 @@
       </p:grpSpPr>
       <p:pic>
         <p:nvPicPr>
-          <p:cNvPr id="1932398629" name="object 2"/>
+          <p:cNvPr id="555723927" name="object 2"/>
           <p:cNvPicPr/>
           <p:nvPr/>
         </p:nvPicPr>
@@ -7940,7 +7940,7 @@
       </p:pic>
       <p:sp>
         <p:nvSpPr>
-          <p:cNvPr id="1667161121" name="object 3"/>
+          <p:cNvPr id="2111963643" name="object 3"/>
           <p:cNvSpPr/>
           <p:nvPr/>
         </p:nvSpPr>
@@ -7993,7 +7993,7 @@
       </p:sp>
       <p:sp>
         <p:nvSpPr>
-          <p:cNvPr id="316280946" name="object 4"/>
+          <p:cNvPr id="1988154679" name="object 4"/>
           <p:cNvSpPr txBox="1"/>
           <p:nvPr/>
         </p:nvSpPr>
@@ -8120,7 +8120,7 @@
       </p:sp>
       <p:sp>
         <p:nvSpPr>
-          <p:cNvPr id="1640594770" name="object 5"/>
+          <p:cNvPr id="188535314" name="object 5"/>
           <p:cNvSpPr txBox="1"/>
           <p:nvPr/>
         </p:nvSpPr>
@@ -8263,7 +8263,7 @@
       </p:sp>
       <p:sp>
         <p:nvSpPr>
-          <p:cNvPr id="699149089" name="object 6"/>
+          <p:cNvPr id="2070575236" name="object 6"/>
           <p:cNvSpPr txBox="1"/>
           <p:nvPr/>
         </p:nvSpPr>
@@ -9184,7 +9184,7 @@
       </p:grpSpPr>
       <p:pic>
         <p:nvPicPr>
-          <p:cNvPr id="1300668500" name="object 2"/>
+          <p:cNvPr id="802664993" name="object 2"/>
           <p:cNvPicPr/>
           <p:nvPr/>
         </p:nvPicPr>
@@ -9204,7 +9204,7 @@
       </p:pic>
       <p:sp>
         <p:nvSpPr>
-          <p:cNvPr id="841420417" name="object 3"/>
+          <p:cNvPr id="480851840" name="object 3"/>
           <p:cNvSpPr/>
           <p:nvPr/>
         </p:nvSpPr>
@@ -9257,7 +9257,7 @@
       </p:sp>
       <p:sp>
         <p:nvSpPr>
-          <p:cNvPr id="2023676891" name="object 4"/>
+          <p:cNvPr id="1037915952" name="object 4"/>
           <p:cNvSpPr txBox="1"/>
           <p:nvPr/>
         </p:nvSpPr>
@@ -9404,7 +9404,7 @@
       </p:sp>
       <p:sp>
         <p:nvSpPr>
-          <p:cNvPr id="932023686" name="object 5"/>
+          <p:cNvPr id="1453203222" name="object 5"/>
           <p:cNvSpPr txBox="1"/>
           <p:nvPr/>
         </p:nvSpPr>
@@ -9973,7 +9973,7 @@
       </p:grpSpPr>
       <p:sp>
         <p:nvSpPr>
-          <p:cNvPr id="1626611745" name="object 2"/>
+          <p:cNvPr id="217654996" name="object 2"/>
           <p:cNvSpPr/>
           <p:nvPr/>
         </p:nvSpPr>
@@ -10026,7 +10026,7 @@
       </p:sp>
       <p:pic>
         <p:nvPicPr>
-          <p:cNvPr id="913696000" name="object 3"/>
+          <p:cNvPr id="1485584133" name="object 3"/>
           <p:cNvPicPr/>
           <p:nvPr/>
         </p:nvPicPr>
@@ -10046,7 +10046,7 @@
       </p:pic>
       <p:pic>
         <p:nvPicPr>
-          <p:cNvPr id="783056311" name="object 4"/>
+          <p:cNvPr id="107797645" name="object 4"/>
           <p:cNvPicPr/>
           <p:nvPr/>
         </p:nvPicPr>
@@ -10066,7 +10066,7 @@
       </p:pic>
       <p:sp>
         <p:nvSpPr>
-          <p:cNvPr id="1144506841" name="object 5"/>
+          <p:cNvPr id="1965832845" name="object 5"/>
           <p:cNvSpPr txBox="1">
             <a:spLocks noGrp="1"/>
           </p:cNvSpPr>
@@ -10139,21 +10139,21 @@
       </p:sp>
       <p:sp>
         <p:nvSpPr>
-          <p:cNvPr id="1636871407" name="object 6"/>
+          <p:cNvPr id="422387922" name="object 6"/>
           <p:cNvSpPr txBox="1"/>
           <p:nvPr/>
         </p:nvSpPr>
         <p:spPr bwMode="auto">
-          <a:xfrm>
-            <a:off x="1207414" y="1014476"/>
-            <a:ext cx="5344795" cy="3989704"/>
+          <a:xfrm flipH="0" flipV="0">
+            <a:off x="914337" y="1014475"/>
+            <a:ext cx="5857959" cy="3976729"/>
           </a:xfrm>
           <a:prstGeom prst="rect">
             <a:avLst/>
           </a:prstGeom>
         </p:spPr>
         <p:txBody>
-          <a:bodyPr vert="horz" wrap="square" lIns="0" tIns="13335" rIns="0" bIns="0" rtlCol="0">
+          <a:bodyPr vert="horz" wrap="square" lIns="0" tIns="13334" rIns="0" bIns="0" rtlCol="0">
             <a:spAutoFit/>
           </a:bodyPr>
           <a:lstStyle/>
@@ -10285,162 +10285,164 @@
               <a:t>int</a:t>
             </a:r>
             <a:r>
-              <a:rPr sz="2000" spc="-30">
+              <a:rPr sz="2000" spc="-15">
+                <a:solidFill>
+                  <a:srgbClr val="808080"/>
+                </a:solidFill>
+                <a:latin typeface="Consolas"/>
+                <a:cs typeface="Consolas"/>
+              </a:rPr>
+              <a:t> b</a:t>
+            </a:r>
+            <a:r>
+              <a:rPr sz="2000" spc="-15">
+                <a:latin typeface="Consolas"/>
+                <a:cs typeface="Consolas"/>
+              </a:rPr>
+              <a:t>):i(</a:t>
+            </a:r>
+            <a:r>
+              <a:rPr sz="2000" spc="-15">
+                <a:solidFill>
+                  <a:srgbClr val="808080"/>
+                </a:solidFill>
+                <a:latin typeface="Consolas"/>
+                <a:cs typeface="Consolas"/>
+              </a:rPr>
+              <a:t>a</a:t>
+            </a:r>
+            <a:r>
+              <a:rPr sz="2000" spc="-15">
+                <a:latin typeface="Consolas"/>
+                <a:cs typeface="Consolas"/>
+              </a:rPr>
+              <a:t>),j(</a:t>
+            </a:r>
+            <a:r>
+              <a:rPr sz="2000" spc="-15">
+                <a:solidFill>
+                  <a:srgbClr val="808080"/>
+                </a:solidFill>
+                <a:latin typeface="Consolas"/>
+                <a:cs typeface="Consolas"/>
+              </a:rPr>
+              <a:t>b</a:t>
+            </a:r>
+            <a:r>
+              <a:rPr sz="2000" spc="-15">
+                <a:latin typeface="Consolas"/>
+                <a:cs typeface="Consolas"/>
+              </a:rPr>
+              <a:t>){} </a:t>
+            </a:r>
+            <a:endParaRPr sz="2000" spc="-14">
+              <a:latin typeface="Consolas"/>
+              <a:cs typeface="Consolas"/>
+            </a:endParaRPr>
+          </a:p>
+          <a:p>
+            <a:pPr marL="469899" marR="5079">
+              <a:lnSpc>
+                <a:spcPct val="100000"/>
+              </a:lnSpc>
+              <a:defRPr/>
+            </a:pPr>
+            <a:r>
+              <a:rPr sz="2000" spc="-1084">
+                <a:latin typeface="Consolas"/>
+                <a:cs typeface="Consolas"/>
+              </a:rPr>
+              <a:t> </a:t>
+            </a:r>
+            <a:r>
+              <a:rPr sz="2000">
                 <a:solidFill>
                   <a:srgbClr val="0000FF"/>
                 </a:solidFill>
                 <a:latin typeface="Consolas"/>
                 <a:cs typeface="Consolas"/>
               </a:rPr>
-              <a:t> </a:t>
-            </a:r>
-            <a:r>
-              <a:rPr sz="2000" spc="-15">
+              <a:t>int</a:t>
+            </a:r>
+            <a:r>
+              <a:rPr sz="2000" spc="-34">
+                <a:solidFill>
+                  <a:srgbClr val="0000FF"/>
+                </a:solidFill>
+                <a:latin typeface="Consolas"/>
+                <a:cs typeface="Consolas"/>
+              </a:rPr>
+              <a:t> </a:t>
+            </a:r>
+            <a:r>
+              <a:rPr sz="2000" spc="-4">
+                <a:solidFill>
+                  <a:srgbClr val="008080"/>
+                </a:solidFill>
+                <a:latin typeface="Consolas"/>
+                <a:cs typeface="Consolas"/>
+              </a:rPr>
+              <a:t>operator</a:t>
+            </a:r>
+            <a:r>
+              <a:rPr sz="2000" spc="-19">
+                <a:solidFill>
+                  <a:srgbClr val="008080"/>
+                </a:solidFill>
+                <a:latin typeface="Consolas"/>
+                <a:cs typeface="Consolas"/>
+              </a:rPr>
+              <a:t> </a:t>
+            </a:r>
+            <a:r>
+              <a:rPr sz="2000" spc="-4">
+                <a:solidFill>
+                  <a:srgbClr val="008080"/>
+                </a:solidFill>
+                <a:latin typeface="Consolas"/>
+                <a:cs typeface="Consolas"/>
+              </a:rPr>
+              <a:t>+</a:t>
+            </a:r>
+            <a:r>
+              <a:rPr sz="2000" spc="-4">
+                <a:latin typeface="Consolas"/>
+                <a:cs typeface="Consolas"/>
+              </a:rPr>
+              <a:t>(</a:t>
+            </a:r>
+            <a:r>
+              <a:rPr sz="2000" spc="-4">
+                <a:solidFill>
+                  <a:srgbClr val="2B91AD"/>
+                </a:solidFill>
+                <a:latin typeface="Consolas"/>
+                <a:cs typeface="Consolas"/>
+              </a:rPr>
+              <a:t>Calculator</a:t>
+            </a:r>
+            <a:r>
+              <a:rPr sz="2000" spc="-29">
+                <a:solidFill>
+                  <a:srgbClr val="2B91AD"/>
+                </a:solidFill>
+                <a:latin typeface="Consolas"/>
+                <a:cs typeface="Consolas"/>
+              </a:rPr>
+              <a:t> </a:t>
+            </a:r>
+            <a:r>
+              <a:rPr sz="2000" spc="-14">
                 <a:solidFill>
                   <a:srgbClr val="808080"/>
                 </a:solidFill>
                 <a:latin typeface="Consolas"/>
                 <a:cs typeface="Consolas"/>
               </a:rPr>
-              <a:t>b</a:t>
-            </a:r>
-            <a:r>
-              <a:rPr sz="2000" spc="-15">
-                <a:latin typeface="Consolas"/>
-                <a:cs typeface="Consolas"/>
-              </a:rPr>
-              <a:t>):i(</a:t>
-            </a:r>
-            <a:r>
-              <a:rPr sz="2000" spc="-15">
-                <a:solidFill>
-                  <a:srgbClr val="808080"/>
-                </a:solidFill>
-                <a:latin typeface="Consolas"/>
-                <a:cs typeface="Consolas"/>
-              </a:rPr>
-              <a:t>a</a:t>
-            </a:r>
-            <a:r>
-              <a:rPr sz="2000" spc="-15">
-                <a:latin typeface="Consolas"/>
-                <a:cs typeface="Consolas"/>
-              </a:rPr>
-              <a:t>),j(</a:t>
-            </a:r>
-            <a:r>
-              <a:rPr sz="2000" spc="-15">
-                <a:solidFill>
-                  <a:srgbClr val="808080"/>
-                </a:solidFill>
-                <a:latin typeface="Consolas"/>
-                <a:cs typeface="Consolas"/>
-              </a:rPr>
-              <a:t>b</a:t>
-            </a:r>
-            <a:r>
-              <a:rPr sz="2000" spc="-15">
-                <a:latin typeface="Consolas"/>
-                <a:cs typeface="Consolas"/>
-              </a:rPr>
-              <a:t>){} </a:t>
-            </a:r>
-            <a:r>
-              <a:rPr sz="2000" spc="-1085">
-                <a:latin typeface="Consolas"/>
-                <a:cs typeface="Consolas"/>
-              </a:rPr>
-              <a:t> </a:t>
-            </a:r>
-            <a:r>
-              <a:rPr sz="2000">
-                <a:solidFill>
-                  <a:srgbClr val="0000FF"/>
-                </a:solidFill>
-                <a:latin typeface="Consolas"/>
-                <a:cs typeface="Consolas"/>
-              </a:rPr>
-              <a:t>int</a:t>
-            </a:r>
-            <a:r>
-              <a:rPr sz="2000" spc="-35">
-                <a:solidFill>
-                  <a:srgbClr val="0000FF"/>
-                </a:solidFill>
-                <a:latin typeface="Consolas"/>
-                <a:cs typeface="Consolas"/>
-              </a:rPr>
-              <a:t> </a:t>
-            </a:r>
-            <a:r>
-              <a:rPr sz="2000" spc="-5">
-                <a:solidFill>
-                  <a:srgbClr val="008080"/>
-                </a:solidFill>
-                <a:latin typeface="Consolas"/>
-                <a:cs typeface="Consolas"/>
-              </a:rPr>
-              <a:t>operator</a:t>
-            </a:r>
-            <a:r>
-              <a:rPr sz="2000" spc="-20">
-                <a:solidFill>
-                  <a:srgbClr val="008080"/>
-                </a:solidFill>
-                <a:latin typeface="Consolas"/>
-                <a:cs typeface="Consolas"/>
-              </a:rPr>
-              <a:t> </a:t>
-            </a:r>
-            <a:r>
-              <a:rPr sz="2000" spc="-5">
-                <a:solidFill>
-                  <a:srgbClr val="008080"/>
-                </a:solidFill>
-                <a:latin typeface="Consolas"/>
-                <a:cs typeface="Consolas"/>
-              </a:rPr>
-              <a:t>+</a:t>
-            </a:r>
-            <a:r>
-              <a:rPr sz="2000" spc="-5">
-                <a:latin typeface="Consolas"/>
-                <a:cs typeface="Consolas"/>
-              </a:rPr>
-              <a:t>(</a:t>
-            </a:r>
-            <a:r>
-              <a:rPr sz="2000" spc="-5">
-                <a:solidFill>
-                  <a:srgbClr val="2B91AD"/>
-                </a:solidFill>
-                <a:latin typeface="Consolas"/>
-                <a:cs typeface="Consolas"/>
-              </a:rPr>
-              <a:t>Calculator</a:t>
-            </a:r>
-            <a:r>
-              <a:rPr sz="2000" spc="-30">
-                <a:solidFill>
-                  <a:srgbClr val="2B91AD"/>
-                </a:solidFill>
-                <a:latin typeface="Consolas"/>
-                <a:cs typeface="Consolas"/>
-              </a:rPr>
-              <a:t> </a:t>
-            </a:r>
-            <a:r>
-              <a:rPr sz="2000" spc="-15">
-                <a:solidFill>
-                  <a:srgbClr val="808080"/>
-                </a:solidFill>
-                <a:latin typeface="Consolas"/>
-                <a:cs typeface="Consolas"/>
-              </a:rPr>
               <a:t>c</a:t>
             </a:r>
             <a:r>
-              <a:rPr sz="2000" spc="-15">
+              <a:rPr sz="2000" spc="-14">
                 <a:latin typeface="Consolas"/>
                 <a:cs typeface="Consolas"/>
               </a:rPr>
@@ -10846,7 +10848,7 @@
       </p:sp>
       <p:sp>
         <p:nvSpPr>
-          <p:cNvPr id="1890655845" name="object 7"/>
+          <p:cNvPr id="1085992337" name="object 7"/>
           <p:cNvSpPr txBox="1"/>
           <p:nvPr/>
         </p:nvSpPr>
@@ -11109,7 +11111,7 @@
       </p:sp>
       <p:sp>
         <p:nvSpPr>
-          <p:cNvPr id="1466737078" name="object 8"/>
+          <p:cNvPr id="2101397359" name="object 8"/>
           <p:cNvSpPr/>
           <p:nvPr/>
         </p:nvSpPr>
@@ -11162,7 +11164,7 @@
       </p:sp>
       <p:sp>
         <p:nvSpPr>
-          <p:cNvPr id="1187696048" name="object 9"/>
+          <p:cNvPr id="161949364" name="object 9"/>
           <p:cNvSpPr txBox="1"/>
           <p:nvPr/>
         </p:nvSpPr>
@@ -11259,7 +11261,7 @@
       </p:sp>
       <p:sp>
         <p:nvSpPr>
-          <p:cNvPr id="1610349223" name="object 10"/>
+          <p:cNvPr id="820626363" name="object 10"/>
           <p:cNvSpPr txBox="1"/>
           <p:nvPr/>
         </p:nvSpPr>
@@ -11359,7 +11361,7 @@
       </p:grpSpPr>
       <p:pic>
         <p:nvPicPr>
-          <p:cNvPr id="1303743449" name="object 2"/>
+          <p:cNvPr id="592112715" name="object 2"/>
           <p:cNvPicPr/>
           <p:nvPr/>
         </p:nvPicPr>
@@ -11379,7 +11381,7 @@
       </p:pic>
       <p:sp>
         <p:nvSpPr>
-          <p:cNvPr id="686454415" name="object 3"/>
+          <p:cNvPr id="1100356894" name="object 3"/>
           <p:cNvSpPr txBox="1"/>
           <p:nvPr/>
         </p:nvSpPr>
@@ -11674,7 +11676,7 @@
       </p:sp>
       <p:sp>
         <p:nvSpPr>
-          <p:cNvPr id="1593632361" name="object 4"/>
+          <p:cNvPr id="930663678" name="object 4"/>
           <p:cNvSpPr txBox="1"/>
           <p:nvPr/>
         </p:nvSpPr>
@@ -12026,7 +12028,7 @@
       </p:sp>
       <p:sp>
         <p:nvSpPr>
-          <p:cNvPr id="467056929" name="object 5"/>
+          <p:cNvPr id="101086581" name="object 5"/>
           <p:cNvSpPr/>
           <p:nvPr/>
         </p:nvSpPr>
@@ -12097,7 +12099,7 @@
       </p:sp>
       <p:graphicFrame>
         <p:nvGraphicFramePr>
-          <p:cNvPr id="1251377238" name="object 6"/>
+          <p:cNvPr id="1821395130" name="object 6"/>
           <p:cNvGraphicFramePr>
             <a:graphicFrameLocks xmlns:a="http://schemas.openxmlformats.org/drawingml/2006/main" noGrp="1"/>
           </p:cNvGraphicFramePr>
@@ -12715,7 +12717,7 @@
       </p:graphicFrame>
       <p:sp>
         <p:nvSpPr>
-          <p:cNvPr id="355750067" name="object 7"/>
+          <p:cNvPr id="1002767618" name="object 7"/>
           <p:cNvSpPr txBox="1"/>
           <p:nvPr/>
         </p:nvSpPr>
@@ -12759,7 +12761,7 @@
       </p:sp>
       <p:sp>
         <p:nvSpPr>
-          <p:cNvPr id="1278709944" name="object 8"/>
+          <p:cNvPr id="1378317979" name="object 8"/>
           <p:cNvSpPr txBox="1"/>
           <p:nvPr/>
         </p:nvSpPr>
@@ -13189,7 +13191,7 @@
       </p:sp>
       <p:sp>
         <p:nvSpPr>
-          <p:cNvPr id="1198967993" name="object 9"/>
+          <p:cNvPr id="1567706484" name="object 9"/>
           <p:cNvSpPr txBox="1"/>
           <p:nvPr/>
         </p:nvSpPr>
@@ -13661,7 +13663,7 @@
       </p:grpSpPr>
       <p:sp>
         <p:nvSpPr>
-          <p:cNvPr id="988897111" name="object 2"/>
+          <p:cNvPr id="1433471675" name="object 2"/>
           <p:cNvSpPr txBox="1"/>
           <p:nvPr/>
         </p:nvSpPr>
@@ -14655,7 +14657,7 @@
       </p:sp>
       <p:sp>
         <p:nvSpPr>
-          <p:cNvPr id="1334798762" name="object 3"/>
+          <p:cNvPr id="1240575452" name="object 3"/>
           <p:cNvSpPr txBox="1"/>
           <p:nvPr/>
         </p:nvSpPr>
@@ -15085,7 +15087,7 @@
       </p:sp>
       <p:sp>
         <p:nvSpPr>
-          <p:cNvPr id="2129237596" name="object 4"/>
+          <p:cNvPr id="1173429062" name="object 4"/>
           <p:cNvSpPr/>
           <p:nvPr/>
         </p:nvSpPr>
@@ -15138,7 +15140,7 @@
       </p:sp>
       <p:sp>
         <p:nvSpPr>
-          <p:cNvPr id="1673757741" name="object 5"/>
+          <p:cNvPr id="1142519819" name="object 5"/>
           <p:cNvSpPr txBox="1"/>
           <p:nvPr/>
         </p:nvSpPr>
@@ -15262,7 +15264,7 @@
       </p:sp>
       <p:sp>
         <p:nvSpPr>
-          <p:cNvPr id="1338872174" name="object 6"/>
+          <p:cNvPr id="1569224159" name="object 6"/>
           <p:cNvSpPr txBox="1">
             <a:spLocks noGrp="1"/>
           </p:cNvSpPr>
@@ -15556,7 +15558,7 @@
       </p:grpSpPr>
       <p:pic>
         <p:nvPicPr>
-          <p:cNvPr id="65574088" name="object 2"/>
+          <p:cNvPr id="1503629295" name="object 2"/>
           <p:cNvPicPr/>
           <p:nvPr/>
         </p:nvPicPr>
@@ -15576,7 +15578,7 @@
       </p:pic>
       <p:sp>
         <p:nvSpPr>
-          <p:cNvPr id="1139224186" name="object 3"/>
+          <p:cNvPr id="324819646" name="object 3"/>
           <p:cNvSpPr txBox="1"/>
           <p:nvPr/>
         </p:nvSpPr>
@@ -15871,7 +15873,7 @@
       </p:sp>
       <p:sp>
         <p:nvSpPr>
-          <p:cNvPr id="1471248697" name="object 4"/>
+          <p:cNvPr id="298302674" name="object 4"/>
           <p:cNvSpPr txBox="1"/>
           <p:nvPr/>
         </p:nvSpPr>
@@ -16223,7 +16225,7 @@
       </p:sp>
       <p:sp>
         <p:nvSpPr>
-          <p:cNvPr id="325384438" name="object 5"/>
+          <p:cNvPr id="1019395358" name="object 5"/>
           <p:cNvSpPr/>
           <p:nvPr/>
         </p:nvSpPr>
@@ -16294,7 +16296,7 @@
       </p:sp>
       <p:graphicFrame>
         <p:nvGraphicFramePr>
-          <p:cNvPr id="738684480" name="object 6"/>
+          <p:cNvPr id="308863988" name="object 6"/>
           <p:cNvGraphicFramePr>
             <a:graphicFrameLocks xmlns:a="http://schemas.openxmlformats.org/drawingml/2006/main" noGrp="1"/>
           </p:cNvGraphicFramePr>
@@ -16912,7 +16914,7 @@
       </p:graphicFrame>
       <p:sp>
         <p:nvSpPr>
-          <p:cNvPr id="898121460" name="object 7"/>
+          <p:cNvPr id="2110087852" name="object 7"/>
           <p:cNvSpPr txBox="1"/>
           <p:nvPr/>
         </p:nvSpPr>
@@ -16956,7 +16958,7 @@
       </p:sp>
       <p:sp>
         <p:nvSpPr>
-          <p:cNvPr id="566581952" name="object 8"/>
+          <p:cNvPr id="1216559869" name="object 8"/>
           <p:cNvSpPr txBox="1"/>
           <p:nvPr/>
         </p:nvSpPr>
@@ -17426,7 +17428,7 @@
       </p:grpSpPr>
       <p:sp>
         <p:nvSpPr>
-          <p:cNvPr id="296096813" name="object 2"/>
+          <p:cNvPr id="71995240" name="object 2"/>
           <p:cNvSpPr txBox="1">
             <a:spLocks noGrp="1"/>
           </p:cNvSpPr>
@@ -17512,7 +17514,7 @@
       </p:sp>
       <p:sp>
         <p:nvSpPr>
-          <p:cNvPr id="373515906" name="object 3"/>
+          <p:cNvPr id="166266121" name="object 3"/>
           <p:cNvSpPr txBox="1"/>
           <p:nvPr/>
         </p:nvSpPr>
@@ -17559,7 +17561,7 @@
       </p:sp>
       <p:sp>
         <p:nvSpPr>
-          <p:cNvPr id="172027990" name="object 4"/>
+          <p:cNvPr id="2124290452" name="object 4"/>
           <p:cNvSpPr txBox="1"/>
           <p:nvPr/>
         </p:nvSpPr>
@@ -17659,7 +17661,7 @@
       </p:grpSpPr>
       <p:pic>
         <p:nvPicPr>
-          <p:cNvPr id="983812652" name="object 2"/>
+          <p:cNvPr id="1502834928" name="object 2"/>
           <p:cNvPicPr/>
           <p:nvPr/>
         </p:nvPicPr>
@@ -17679,7 +17681,7 @@
       </p:pic>
       <p:grpSp>
         <p:nvGrpSpPr>
-          <p:cNvPr id="19476184" name="object 3"/>
+          <p:cNvPr id="1912353003" name="object 3"/>
           <p:cNvGrpSpPr/>
           <p:nvPr/>
         </p:nvGrpSpPr>
@@ -17767,7 +17769,7 @@
       </p:grpSpPr>
       <p:pic>
         <p:nvPicPr>
-          <p:cNvPr id="1844104145" name="object 2"/>
+          <p:cNvPr id="131796937" name="object 2"/>
           <p:cNvPicPr/>
           <p:nvPr/>
         </p:nvPicPr>
@@ -17787,7 +17789,7 @@
       </p:pic>
       <p:grpSp>
         <p:nvGrpSpPr>
-          <p:cNvPr id="1692082015" name="object 3"/>
+          <p:cNvPr id="645364160" name="object 3"/>
           <p:cNvGrpSpPr/>
           <p:nvPr/>
         </p:nvGrpSpPr>
@@ -17875,7 +17877,7 @@
       </p:grpSpPr>
       <p:pic>
         <p:nvPicPr>
-          <p:cNvPr id="1614710981" name="object 2"/>
+          <p:cNvPr id="82068794" name="object 2"/>
           <p:cNvPicPr/>
           <p:nvPr/>
         </p:nvPicPr>
@@ -17895,7 +17897,7 @@
       </p:pic>
       <p:grpSp>
         <p:nvGrpSpPr>
-          <p:cNvPr id="1730330501" name="object 3"/>
+          <p:cNvPr id="1578574598" name="object 3"/>
           <p:cNvGrpSpPr/>
           <p:nvPr/>
         </p:nvGrpSpPr>
@@ -17983,7 +17985,7 @@
       </p:grpSpPr>
       <p:sp>
         <p:nvSpPr>
-          <p:cNvPr id="1025916295" name="object 2"/>
+          <p:cNvPr id="998685631" name="object 2"/>
           <p:cNvSpPr txBox="1">
             <a:spLocks noGrp="1"/>
           </p:cNvSpPr>
@@ -18498,7 +18500,7 @@
       </p:sp>
       <p:sp>
         <p:nvSpPr>
-          <p:cNvPr id="842236888" name="object 3"/>
+          <p:cNvPr id="992063413" name="object 3"/>
           <p:cNvSpPr txBox="1">
             <a:spLocks noGrp="1"/>
           </p:cNvSpPr>
@@ -18582,7 +18584,7 @@
       </p:grpSpPr>
       <p:sp>
         <p:nvSpPr>
-          <p:cNvPr id="380455218" name="TextBox 2"/>
+          <p:cNvPr id="2025926477" name="TextBox 2"/>
           <p:cNvSpPr txBox="1"/>
           <p:nvPr/>
         </p:nvSpPr>
@@ -18615,7 +18617,7 @@
       </p:sp>
       <p:sp>
         <p:nvSpPr>
-          <p:cNvPr id="1015493082" name="TextBox 4"/>
+          <p:cNvPr id="491706511" name="TextBox 4"/>
           <p:cNvSpPr txBox="1"/>
           <p:nvPr/>
         </p:nvSpPr>
@@ -18701,7 +18703,7 @@
       </p:grpSpPr>
       <p:sp>
         <p:nvSpPr>
-          <p:cNvPr id="1410620793" name="TextBox 2"/>
+          <p:cNvPr id="2128019912" name="TextBox 2"/>
           <p:cNvSpPr txBox="1"/>
           <p:nvPr/>
         </p:nvSpPr>
@@ -19058,7 +19060,7 @@
       </p:sp>
       <p:sp>
         <p:nvSpPr>
-          <p:cNvPr id="1795273760" name="TextBox 4"/>
+          <p:cNvPr id="2018405980" name="TextBox 4"/>
           <p:cNvSpPr txBox="1"/>
           <p:nvPr/>
         </p:nvSpPr>
@@ -19268,7 +19270,7 @@
       </p:grpSpPr>
       <p:sp>
         <p:nvSpPr>
-          <p:cNvPr id="199810837" name="object 2"/>
+          <p:cNvPr id="1570807748" name="object 2"/>
           <p:cNvSpPr txBox="1">
             <a:spLocks noGrp="1"/>
           </p:cNvSpPr>
@@ -19349,7 +19351,7 @@
       </p:sp>
       <p:sp>
         <p:nvSpPr>
-          <p:cNvPr id="1099161437" name="object 3"/>
+          <p:cNvPr id="1873544675" name="object 3"/>
           <p:cNvSpPr txBox="1"/>
           <p:nvPr/>
         </p:nvSpPr>
@@ -19635,7 +19637,7 @@
       </p:sp>
       <p:sp>
         <p:nvSpPr>
-          <p:cNvPr id="2111748149" name="object 4"/>
+          <p:cNvPr id="89032575" name="object 4"/>
           <p:cNvSpPr txBox="1"/>
           <p:nvPr/>
         </p:nvSpPr>
@@ -19715,7 +19717,7 @@
       </p:grpSpPr>
       <p:pic>
         <p:nvPicPr>
-          <p:cNvPr id="233639584" name="object 2"/>
+          <p:cNvPr id="1316117630" name="object 2"/>
           <p:cNvPicPr/>
           <p:nvPr/>
         </p:nvPicPr>
@@ -19735,7 +19737,7 @@
       </p:pic>
       <p:pic>
         <p:nvPicPr>
-          <p:cNvPr id="1091143954" name="object 3"/>
+          <p:cNvPr id="1928540585" name="object 3"/>
           <p:cNvPicPr/>
           <p:nvPr/>
         </p:nvPicPr>
@@ -19755,7 +19757,7 @@
       </p:pic>
       <p:pic>
         <p:nvPicPr>
-          <p:cNvPr id="1219692772" name="object 4"/>
+          <p:cNvPr id="1133331604" name="object 4"/>
           <p:cNvPicPr/>
           <p:nvPr/>
         </p:nvPicPr>
@@ -19808,7 +19810,7 @@
       </p:grpSpPr>
       <p:sp>
         <p:nvSpPr>
-          <p:cNvPr id="1039780691" name="object 2"/>
+          <p:cNvPr id="1516347047" name="object 2"/>
           <p:cNvSpPr txBox="1"/>
           <p:nvPr/>
         </p:nvSpPr>
@@ -21353,7 +21355,7 @@
       </p:sp>
       <p:sp>
         <p:nvSpPr>
-          <p:cNvPr id="111015732" name="object 3"/>
+          <p:cNvPr id="162110188" name="object 3"/>
           <p:cNvSpPr txBox="1">
             <a:spLocks noGrp="1"/>
           </p:cNvSpPr>
@@ -21507,7 +21509,7 @@
       </p:grpSpPr>
       <p:pic>
         <p:nvPicPr>
-          <p:cNvPr id="1543465821" name="object 2"/>
+          <p:cNvPr id="1121019676" name="object 2"/>
           <p:cNvPicPr/>
           <p:nvPr/>
         </p:nvPicPr>
@@ -21527,7 +21529,7 @@
       </p:pic>
       <p:sp>
         <p:nvSpPr>
-          <p:cNvPr id="1361184078" name="object 3"/>
+          <p:cNvPr id="164000152" name="object 3"/>
           <p:cNvSpPr txBox="1"/>
           <p:nvPr/>
         </p:nvSpPr>
@@ -22150,7 +22152,7 @@
       </p:sp>
       <p:sp>
         <p:nvSpPr>
-          <p:cNvPr id="481683209" name="object 4"/>
+          <p:cNvPr id="1488240203" name="object 4"/>
           <p:cNvSpPr txBox="1">
             <a:spLocks noGrp="1"/>
           </p:cNvSpPr>
@@ -22254,7 +22256,7 @@
       </p:grpSpPr>
       <p:sp>
         <p:nvSpPr>
-          <p:cNvPr id="1832910303" name="object 2"/>
+          <p:cNvPr id="1644556224" name="object 2"/>
           <p:cNvSpPr/>
           <p:nvPr/>
         </p:nvSpPr>
@@ -22307,7 +22309,7 @@
       </p:sp>
       <p:pic>
         <p:nvPicPr>
-          <p:cNvPr id="1486133074" name="object 3"/>
+          <p:cNvPr id="1568344097" name="object 3"/>
           <p:cNvPicPr/>
           <p:nvPr/>
         </p:nvPicPr>
@@ -22327,7 +22329,7 @@
       </p:pic>
       <p:sp>
         <p:nvSpPr>
-          <p:cNvPr id="756298314" name="object 4"/>
+          <p:cNvPr id="1329072061" name="object 4"/>
           <p:cNvSpPr txBox="1"/>
           <p:nvPr/>
         </p:nvSpPr>
@@ -22504,7 +22506,7 @@
       </p:sp>
       <p:sp>
         <p:nvSpPr>
-          <p:cNvPr id="2086234027" name="object 5"/>
+          <p:cNvPr id="2004684353" name="object 5"/>
           <p:cNvSpPr txBox="1"/>
           <p:nvPr/>
         </p:nvSpPr>
@@ -22756,7 +22758,7 @@
       </p:sp>
       <p:sp>
         <p:nvSpPr>
-          <p:cNvPr id="1068757822" name="object 6"/>
+          <p:cNvPr id="2118757233" name="object 6"/>
           <p:cNvSpPr txBox="1"/>
           <p:nvPr/>
         </p:nvSpPr>
@@ -23398,7 +23400,7 @@
       </p:grpSpPr>
       <p:pic>
         <p:nvPicPr>
-          <p:cNvPr id="186712040" name="object 2"/>
+          <p:cNvPr id="1040304341" name="object 2"/>
           <p:cNvPicPr/>
           <p:nvPr/>
         </p:nvPicPr>
@@ -23418,7 +23420,7 @@
       </p:pic>
       <p:sp>
         <p:nvSpPr>
-          <p:cNvPr id="1001513432" name="object 3"/>
+          <p:cNvPr id="1572449972" name="object 3"/>
           <p:cNvSpPr txBox="1"/>
           <p:nvPr/>
         </p:nvSpPr>
@@ -23597,7 +23599,7 @@
       </p:sp>
       <p:sp>
         <p:nvSpPr>
-          <p:cNvPr id="101030030" name="object 4"/>
+          <p:cNvPr id="1981988699" name="object 4"/>
           <p:cNvSpPr/>
           <p:nvPr/>
         </p:nvSpPr>
@@ -23656,7 +23658,7 @@
       </p:sp>
       <p:graphicFrame>
         <p:nvGraphicFramePr>
-          <p:cNvPr id="1865632587" name="object 5"/>
+          <p:cNvPr id="149573599" name="object 5"/>
           <p:cNvGraphicFramePr>
             <a:graphicFrameLocks xmlns:a="http://schemas.openxmlformats.org/drawingml/2006/main" noGrp="1"/>
           </p:cNvGraphicFramePr>
@@ -24239,7 +24241,7 @@
       </p:graphicFrame>
       <p:sp>
         <p:nvSpPr>
-          <p:cNvPr id="893025310" name="object 6"/>
+          <p:cNvPr id="954687907" name="object 6"/>
           <p:cNvSpPr txBox="1"/>
           <p:nvPr/>
         </p:nvSpPr>
@@ -24311,7 +24313,7 @@
       </p:sp>
       <p:sp>
         <p:nvSpPr>
-          <p:cNvPr id="1790833421" name="object 7"/>
+          <p:cNvPr id="1222213878" name="object 7"/>
           <p:cNvSpPr txBox="1"/>
           <p:nvPr/>
         </p:nvSpPr>
@@ -24355,7 +24357,7 @@
       </p:sp>
       <p:sp>
         <p:nvSpPr>
-          <p:cNvPr id="928567646" name="object 8"/>
+          <p:cNvPr id="464502556" name="object 8"/>
           <p:cNvSpPr txBox="1"/>
           <p:nvPr/>
         </p:nvSpPr>
@@ -24532,7 +24534,7 @@
       </p:sp>
       <p:sp>
         <p:nvSpPr>
-          <p:cNvPr id="364567435" name="object 9"/>
+          <p:cNvPr id="281002275" name="object 9"/>
           <p:cNvSpPr txBox="1"/>
           <p:nvPr/>
         </p:nvSpPr>
@@ -24650,7 +24652,7 @@
       </p:sp>
       <p:sp>
         <p:nvSpPr>
-          <p:cNvPr id="1019695118" name="object 10"/>
+          <p:cNvPr id="1876829257" name="object 10"/>
           <p:cNvSpPr txBox="1"/>
           <p:nvPr/>
         </p:nvSpPr>
@@ -24736,7 +24738,7 @@
       </p:sp>
       <p:sp>
         <p:nvSpPr>
-          <p:cNvPr id="718377525" name="object 11"/>
+          <p:cNvPr id="336447821" name="object 11"/>
           <p:cNvSpPr txBox="1"/>
           <p:nvPr/>
         </p:nvSpPr>
@@ -24845,7 +24847,7 @@
       </p:sp>
       <p:sp>
         <p:nvSpPr>
-          <p:cNvPr id="1844276483" name="object 12"/>
+          <p:cNvPr id="1322650325" name="object 12"/>
           <p:cNvSpPr txBox="1"/>
           <p:nvPr/>
         </p:nvSpPr>
@@ -25042,7 +25044,7 @@
       </p:grpSpPr>
       <p:pic>
         <p:nvPicPr>
-          <p:cNvPr id="1950869705" name="object 2"/>
+          <p:cNvPr id="1643142663" name="object 2"/>
           <p:cNvPicPr/>
           <p:nvPr/>
         </p:nvPicPr>
@@ -25062,7 +25064,7 @@
       </p:pic>
       <p:sp>
         <p:nvSpPr>
-          <p:cNvPr id="659594729" name="object 3"/>
+          <p:cNvPr id="1508640959" name="object 3"/>
           <p:cNvSpPr txBox="1"/>
           <p:nvPr/>
         </p:nvSpPr>
@@ -25314,7 +25316,7 @@
       </p:sp>
       <p:sp>
         <p:nvSpPr>
-          <p:cNvPr id="2110397952" name="object 4"/>
+          <p:cNvPr id="345102683" name="object 4"/>
           <p:cNvSpPr txBox="1"/>
           <p:nvPr/>
         </p:nvSpPr>
@@ -25358,7 +25360,7 @@
       </p:sp>
       <p:sp>
         <p:nvSpPr>
-          <p:cNvPr id="1594369636" name="object 5"/>
+          <p:cNvPr id="782416611" name="object 5"/>
           <p:cNvSpPr txBox="1"/>
           <p:nvPr/>
         </p:nvSpPr>
@@ -25402,7 +25404,7 @@
       </p:sp>
       <p:graphicFrame>
         <p:nvGraphicFramePr>
-          <p:cNvPr id="1495469748" name="object 6"/>
+          <p:cNvPr id="402033420" name="object 6"/>
           <p:cNvGraphicFramePr>
             <a:graphicFrameLocks xmlns:a="http://schemas.openxmlformats.org/drawingml/2006/main" noGrp="1"/>
           </p:cNvGraphicFramePr>
@@ -27139,7 +27141,7 @@
       </p:graphicFrame>
       <p:sp>
         <p:nvSpPr>
-          <p:cNvPr id="2055724399" name="object 8"/>
+          <p:cNvPr id="1629008386" name="object 8"/>
           <p:cNvSpPr txBox="1"/>
           <p:nvPr/>
         </p:nvSpPr>
@@ -27284,7 +27286,7 @@
       </p:sp>
       <p:sp>
         <p:nvSpPr>
-          <p:cNvPr id="972677032" name="object 9"/>
+          <p:cNvPr id="1152027623" name="object 9"/>
           <p:cNvSpPr txBox="1"/>
           <p:nvPr/>
         </p:nvSpPr>
@@ -27780,271 +27782,4 @@
   </a:themeElements>
   <a:objectDefaults/>
 </a:theme>
-</file>
-
-<file path=customXml/item1.xml><?xml version="1.0" encoding="utf-8"?>
-<?mso-contentType ?>
-<FormTemplates xmlns="http://schemas.microsoft.com/sharepoint/v3/contenttype/forms">
-  <Display>DocumentLibraryForm</Display>
-  <Edit>DocumentLibraryForm</Edit>
-  <New>DocumentLibraryForm</New>
-</FormTemplates>
-</file>
-
-<file path=customXml/item2.xml><?xml version="1.0" encoding="utf-8"?>
-<p:properties xmlns:p="http://schemas.microsoft.com/office/2006/metadata/properties" xmlns:xsi="http://www.w3.org/2001/XMLSchema-instance" xmlns:pc="http://schemas.microsoft.com/office/infopath/2007/PartnerControls">
-  <documentManagement>
-    <_ip_UnifiedCompliancePolicyUIAction xmlns="http://schemas.microsoft.com/sharepoint/v3" xsi:nil="true"/>
-    <_ip_UnifiedCompliancePolicyProperties xmlns="http://schemas.microsoft.com/sharepoint/v3" xsi:nil="true"/>
-  </documentManagement>
-</p:properties>
-</file>
-
-<file path=customXml/item3.xml><?xml version="1.0" encoding="utf-8"?>
-<ct:contentTypeSchema xmlns:ct="http://schemas.microsoft.com/office/2006/metadata/contentType" xmlns:ma="http://schemas.microsoft.com/office/2006/metadata/properties/metaAttributes" ct:_="" ma:_="" ma:contentTypeName="Document" ma:contentTypeID="0x0101009E1FBEC37679F04BBE82B47BF8706106" ma:contentTypeVersion="13" ma:contentTypeDescription="Create a new document." ma:contentTypeScope="" ma:versionID="e72a7b8ce3551530e982db1181450818">
-  <xsd:schema xmlns:xsd="http://www.w3.org/2001/XMLSchema" xmlns:xs="http://www.w3.org/2001/XMLSchema" xmlns:p="http://schemas.microsoft.com/office/2006/metadata/properties" xmlns:ns1="http://schemas.microsoft.com/sharepoint/v3" xmlns:ns3="db90e87a-34a8-49d5-9137-035b9086fbd0" targetNamespace="http://schemas.microsoft.com/office/2006/metadata/properties" ma:root="true" ma:fieldsID="8d05cb087941a85f6fbde4285e1b37a0" ns1:_="" ns3:_="">
-    <xsd:import namespace="http://schemas.microsoft.com/sharepoint/v3"/>
-    <xsd:import namespace="db90e87a-34a8-49d5-9137-035b9086fbd0"/>
-    <xsd:element name="properties">
-      <xsd:complexType>
-        <xsd:sequence>
-          <xsd:element name="documentManagement">
-            <xsd:complexType>
-              <xsd:all>
-                <xsd:element ref="ns3:MediaServiceMetadata" minOccurs="0"/>
-                <xsd:element ref="ns3:MediaServiceFastMetadata" minOccurs="0"/>
-                <xsd:element ref="ns3:MediaServiceSearchProperties" minOccurs="0"/>
-                <xsd:element ref="ns3:MediaServiceObjectDetectorVersions" minOccurs="0"/>
-                <xsd:element ref="ns3:MediaServiceAutoTags" minOccurs="0"/>
-                <xsd:element ref="ns3:MediaLengthInSeconds" minOccurs="0"/>
-                <xsd:element ref="ns3:MediaServiceDateTaken" minOccurs="0"/>
-                <xsd:element ref="ns3:MediaServiceLocation" minOccurs="0"/>
-                <xsd:element ref="ns3:MediaServiceGenerationTime" minOccurs="0"/>
-                <xsd:element ref="ns3:MediaServiceEventHashCode" minOccurs="0"/>
-                <xsd:element ref="ns1:_ip_UnifiedCompliancePolicyProperties" minOccurs="0"/>
-                <xsd:element ref="ns1:_ip_UnifiedCompliancePolicyUIAction" minOccurs="0"/>
-                <xsd:element ref="ns3:MediaServiceOCR" minOccurs="0"/>
-              </xsd:all>
-            </xsd:complexType>
-          </xsd:element>
-        </xsd:sequence>
-      </xsd:complexType>
-    </xsd:element>
-  </xsd:schema>
-  <xsd:schema xmlns:xsd="http://www.w3.org/2001/XMLSchema" xmlns:xs="http://www.w3.org/2001/XMLSchema" xmlns:dms="http://schemas.microsoft.com/office/2006/documentManagement/types" xmlns:pc="http://schemas.microsoft.com/office/infopath/2007/PartnerControls" targetNamespace="http://schemas.microsoft.com/sharepoint/v3" elementFormDefault="qualified">
-    <xsd:import namespace="http://schemas.microsoft.com/office/2006/documentManagement/types"/>
-    <xsd:import namespace="http://schemas.microsoft.com/office/infopath/2007/PartnerControls"/>
-    <xsd:element name="_ip_UnifiedCompliancePolicyProperties" ma:index="18" nillable="true" ma:displayName="Unified Compliance Policy Properties" ma:hidden="true" ma:internalName="_ip_UnifiedCompliancePolicyProperties">
-      <xsd:simpleType>
-        <xsd:restriction base="dms:Note"/>
-      </xsd:simpleType>
-    </xsd:element>
-    <xsd:element name="_ip_UnifiedCompliancePolicyUIAction" ma:index="19" nillable="true" ma:displayName="Unified Compliance Policy UI Action" ma:hidden="true" ma:internalName="_ip_UnifiedCompliancePolicyUIAction">
-      <xsd:simpleType>
-        <xsd:restriction base="dms:Text"/>
-      </xsd:simpleType>
-    </xsd:element>
-  </xsd:schema>
-  <xsd:schema xmlns:xsd="http://www.w3.org/2001/XMLSchema" xmlns:xs="http://www.w3.org/2001/XMLSchema" xmlns:dms="http://schemas.microsoft.com/office/2006/documentManagement/types" xmlns:pc="http://schemas.microsoft.com/office/infopath/2007/PartnerControls" targetNamespace="db90e87a-34a8-49d5-9137-035b9086fbd0" elementFormDefault="qualified">
-    <xsd:import namespace="http://schemas.microsoft.com/office/2006/documentManagement/types"/>
-    <xsd:import namespace="http://schemas.microsoft.com/office/infopath/2007/PartnerControls"/>
-    <xsd:element name="MediaServiceMetadata" ma:index="8" nillable="true" ma:displayName="MediaServiceMetadata" ma:hidden="true" ma:internalName="MediaServiceMetadata" ma:readOnly="true">
-      <xsd:simpleType>
-        <xsd:restriction base="dms:Note"/>
-      </xsd:simpleType>
-    </xsd:element>
-    <xsd:element name="MediaServiceFastMetadata" ma:index="9" nillable="true" ma:displayName="MediaServiceFastMetadata" ma:hidden="true" ma:internalName="MediaServiceFastMetadata" ma:readOnly="true">
-      <xsd:simpleType>
-        <xsd:restriction base="dms:Note"/>
-      </xsd:simpleType>
-    </xsd:element>
-    <xsd:element name="MediaServiceSearchProperties" ma:index="10" nillable="true" ma:displayName="MediaServiceSearchProperties" ma:hidden="true" ma:internalName="MediaServiceSearchProperties" ma:readOnly="true">
-      <xsd:simpleType>
-        <xsd:restriction base="dms:Note"/>
-      </xsd:simpleType>
-    </xsd:element>
-    <xsd:element name="MediaServiceObjectDetectorVersions" ma:index="11" nillable="true" ma:displayName="MediaServiceObjectDetectorVersions" ma:hidden="true" ma:indexed="true" ma:internalName="MediaServiceObjectDetectorVersions" ma:readOnly="true">
-      <xsd:simpleType>
-        <xsd:restriction base="dms:Text"/>
-      </xsd:simpleType>
-    </xsd:element>
-    <xsd:element name="MediaServiceAutoTags" ma:index="12" nillable="true" ma:displayName="Tags" ma:internalName="MediaServiceAutoTags" ma:readOnly="true">
-      <xsd:simpleType>
-        <xsd:restriction base="dms:Text"/>
-      </xsd:simpleType>
-    </xsd:element>
-    <xsd:element name="MediaLengthInSeconds" ma:index="13" nillable="true" ma:displayName="MediaLengthInSeconds" ma:hidden="true" ma:internalName="MediaLengthInSeconds" ma:readOnly="true">
-      <xsd:simpleType>
-        <xsd:restriction base="dms:Unknown"/>
-      </xsd:simpleType>
-    </xsd:element>
-    <xsd:element name="MediaServiceDateTaken" ma:index="14" nillable="true" ma:displayName="MediaServiceDateTaken" ma:hidden="true" ma:indexed="true" ma:internalName="MediaServiceDateTaken" ma:readOnly="true">
-      <xsd:simpleType>
-        <xsd:restriction base="dms:Text"/>
-      </xsd:simpleType>
-    </xsd:element>
-    <xsd:element name="MediaServiceLocation" ma:index="15" nillable="true" ma:displayName="Location" ma:indexed="true" ma:internalName="MediaServiceLocation" ma:readOnly="true">
-      <xsd:simpleType>
-        <xsd:restriction base="dms:Text"/>
-      </xsd:simpleType>
-    </xsd:element>
-    <xsd:element name="MediaServiceGenerationTime" ma:index="16" nillable="true" ma:displayName="MediaServiceGenerationTime" ma:hidden="true" ma:internalName="MediaServiceGenerationTime" ma:readOnly="true">
-      <xsd:simpleType>
-        <xsd:restriction base="dms:Text"/>
-      </xsd:simpleType>
-    </xsd:element>
-    <xsd:element name="MediaServiceEventHashCode" ma:index="17" nillable="true" ma:displayName="MediaServiceEventHashCode" ma:hidden="true" ma:internalName="MediaServiceEventHashCode" ma:readOnly="true">
-      <xsd:simpleType>
-        <xsd:restriction base="dms:Text"/>
-      </xsd:simpleType>
-    </xsd:element>
-    <xsd:element name="MediaServiceOCR" ma:index="20" nillable="true" ma:displayName="Extracted Text" ma:internalName="MediaServiceOCR" ma:readOnly="true">
-      <xsd:simpleType>
-        <xsd:restriction base="dms:Note">
-          <xsd:maxLength value="255"/>
-        </xsd:restriction>
-      </xsd:simpleType>
-    </xsd:element>
-  </xsd:schema>
-  <xsd:schema xmlns="http://schemas.openxmlformats.org/package/2006/metadata/core-properties" xmlns:xsd="http://www.w3.org/2001/XMLSchema" xmlns:xsi="http://www.w3.org/2001/XMLSchema-instance" xmlns:dc="http://purl.org/dc/elements/1.1/" xmlns:dcterms="http://purl.org/dc/terms/" xmlns:odoc="http://schemas.microsoft.com/internal/obd" targetNamespace="http://schemas.openxmlformats.org/package/2006/metadata/core-properties" elementFormDefault="qualified" attributeFormDefault="unqualified" blockDefault="#all">
-    <xsd:import namespace="http://purl.org/dc/elements/1.1/" schemaLocation="http://dublincore.org/schemas/xmls/qdc/2003/04/02/dc.xsd"/>
-    <xsd:import namespace="http://purl.org/dc/terms/" schemaLocation="http://dublincore.org/schemas/xmls/qdc/2003/04/02/dcterms.xsd"/>
-    <xsd:element name="coreProperties" type="CT_coreProperties"/>
-    <xsd:complexType name="CT_coreProperties">
-      <xsd:all>
-        <xsd:element ref="dc:creator" minOccurs="0" maxOccurs="1"/>
-        <xsd:element ref="dcterms:created" minOccurs="0" maxOccurs="1"/>
-        <xsd:element ref="dc:identifier" minOccurs="0" maxOccurs="1"/>
-        <xsd:element name="contentType" minOccurs="0" maxOccurs="1" type="xsd:string" ma:index="0" ma:displayName="Content Type"/>
-        <xsd:element ref="dc:title" minOccurs="0" maxOccurs="1" ma:index="4" ma:displayName="Title"/>
-        <xsd:element ref="dc:subject" minOccurs="0" maxOccurs="1"/>
-        <xsd:element ref="dc:description" minOccurs="0" maxOccurs="1"/>
-        <xsd:element name="keywords" minOccurs="0" maxOccurs="1" type="xsd:string"/>
-        <xsd:element ref="dc:language" minOccurs="0" maxOccurs="1"/>
-        <xsd:element name="category" minOccurs="0" maxOccurs="1" type="xsd:string"/>
-        <xsd:element name="version" minOccurs="0" maxOccurs="1" type="xsd:string"/>
-        <xsd:element name="revision" minOccurs="0" maxOccurs="1" type="xsd:string">
-          <xsd:annotation>
-            <xsd:documentation>This value indicates the number of saves or revisions. The application is responsible for updating this value after each revision.</xsd:documentation>
-          </xsd:annotation>
-        </xsd:element>
-        <xsd:element name="lastModifiedBy" minOccurs="0" maxOccurs="1" type="xsd:string"/>
-        <xsd:element ref="dcterms:modified" minOccurs="0" maxOccurs="1"/>
-        <xsd:element name="contentStatus" minOccurs="0" maxOccurs="1" type="xsd:string"/>
-      </xsd:all>
-    </xsd:complexType>
-  </xsd:schema>
-  <xs:schema xmlns:pc="http://schemas.microsoft.com/office/infopath/2007/PartnerControls" xmlns:xs="http://www.w3.org/2001/XMLSchema" targetNamespace="http://schemas.microsoft.com/office/infopath/2007/PartnerControls" elementFormDefault="qualified" attributeFormDefault="unqualified">
-    <xs:element name="Person">
-      <xs:complexType>
-        <xs:sequence>
-          <xs:element ref="pc:DisplayName" minOccurs="0"/>
-          <xs:element ref="pc:AccountId" minOccurs="0"/>
-          <xs:element ref="pc:AccountType" minOccurs="0"/>
-        </xs:sequence>
-      </xs:complexType>
-    </xs:element>
-    <xs:element name="DisplayName" type="xs:string"/>
-    <xs:element name="AccountId" type="xs:string"/>
-    <xs:element name="AccountType" type="xs:string"/>
-    <xs:element name="BDCAssociatedEntity">
-      <xs:complexType>
-        <xs:sequence>
-          <xs:element ref="pc:BDCEntity" minOccurs="0" maxOccurs="unbounded"/>
-        </xs:sequence>
-        <xs:attribute ref="pc:EntityNamespace"/>
-        <xs:attribute ref="pc:EntityName"/>
-        <xs:attribute ref="pc:SystemInstanceName"/>
-        <xs:attribute ref="pc:AssociationName"/>
-      </xs:complexType>
-    </xs:element>
-    <xs:attribute name="EntityNamespace" type="xs:string"/>
-    <xs:attribute name="EntityName" type="xs:string"/>
-    <xs:attribute name="SystemInstanceName" type="xs:string"/>
-    <xs:attribute name="AssociationName" type="xs:string"/>
-    <xs:element name="BDCEntity">
-      <xs:complexType>
-        <xs:sequence>
-          <xs:element ref="pc:EntityDisplayName" minOccurs="0"/>
-          <xs:element ref="pc:EntityInstanceReference" minOccurs="0"/>
-          <xs:element ref="pc:EntityId1" minOccurs="0"/>
-          <xs:element ref="pc:EntityId2" minOccurs="0"/>
-          <xs:element ref="pc:EntityId3" minOccurs="0"/>
-          <xs:element ref="pc:EntityId4" minOccurs="0"/>
-          <xs:element ref="pc:EntityId5" minOccurs="0"/>
-        </xs:sequence>
-      </xs:complexType>
-    </xs:element>
-    <xs:element name="EntityDisplayName" type="xs:string"/>
-    <xs:element name="EntityInstanceReference" type="xs:string"/>
-    <xs:element name="EntityId1" type="xs:string"/>
-    <xs:element name="EntityId2" type="xs:string"/>
-    <xs:element name="EntityId3" type="xs:string"/>
-    <xs:element name="EntityId4" type="xs:string"/>
-    <xs:element name="EntityId5" type="xs:string"/>
-    <xs:element name="Terms">
-      <xs:complexType>
-        <xs:sequence>
-          <xs:element ref="pc:TermInfo" minOccurs="0" maxOccurs="unbounded"/>
-        </xs:sequence>
-      </xs:complexType>
-    </xs:element>
-    <xs:element name="TermInfo">
-      <xs:complexType>
-        <xs:sequence>
-          <xs:element ref="pc:TermName" minOccurs="0"/>
-          <xs:element ref="pc:TermId" minOccurs="0"/>
-        </xs:sequence>
-      </xs:complexType>
-    </xs:element>
-    <xs:element name="TermName" type="xs:string"/>
-    <xs:element name="TermId" type="xs:string"/>
-  </xs:schema>
-</ct:contentTypeSchema>
-</file>
-
-<file path=customXml/itemProps1.xml><?xml version="1.0" encoding="utf-8"?>
-<ds:datastoreItem xmlns:ds="http://schemas.openxmlformats.org/officeDocument/2006/customXml" ds:itemID="{DF7899EF-C187-4B3D-8F93-A76F7D114318}">
-  <ds:schemaRefs>
-    <ds:schemaRef ds:uri="http://schemas.microsoft.com/sharepoint/v3/contenttype/forms"/>
-  </ds:schemaRefs>
-</ds:datastoreItem>
-</file>
-
-<file path=customXml/itemProps2.xml><?xml version="1.0" encoding="utf-8"?>
-<ds:datastoreItem xmlns:ds="http://schemas.openxmlformats.org/officeDocument/2006/customXml" ds:itemID="{AAFCE2D2-CD97-4C7E-B5EA-CF2C8C75AF26}">
-  <ds:schemaRefs>
-    <ds:schemaRef ds:uri="http://schemas.microsoft.com/office/2006/documentManagement/types"/>
-    <ds:schemaRef ds:uri="http://schemas.microsoft.com/office/infopath/2007/PartnerControls"/>
-    <ds:schemaRef ds:uri="http://schemas.microsoft.com/office/2006/metadata/properties"/>
-    <ds:schemaRef ds:uri="http://purl.org/dc/elements/1.1/"/>
-    <ds:schemaRef ds:uri="http://www.w3.org/XML/1998/namespace"/>
-    <ds:schemaRef ds:uri="http://schemas.microsoft.com/sharepoint/v3"/>
-    <ds:schemaRef ds:uri="http://purl.org/dc/dcmitype/"/>
-    <ds:schemaRef ds:uri="http://schemas.openxmlformats.org/package/2006/metadata/core-properties"/>
-    <ds:schemaRef ds:uri="db90e87a-34a8-49d5-9137-035b9086fbd0"/>
-    <ds:schemaRef ds:uri="http://purl.org/dc/terms/"/>
-    <ds:schemaRef ds:uri="http://www.w3.org/2001/XMLSchema-instance"/>
-  </ds:schemaRefs>
-</ds:datastoreItem>
-</file>
-
-<file path=customXml/itemProps3.xml><?xml version="1.0" encoding="utf-8"?>
-<ds:datastoreItem xmlns:ds="http://schemas.openxmlformats.org/officeDocument/2006/customXml" ds:itemID="{04207D41-EFCA-47CD-AA38-C7391FBB2729}">
-  <ds:schemaRefs>
-    <ds:schemaRef ds:uri="http://schemas.microsoft.com/office/2006/metadata/contentType"/>
-    <ds:schemaRef ds:uri="http://schemas.microsoft.com/office/2006/metadata/properties/metaAttributes"/>
-    <ds:schemaRef ds:uri="http://www.w3.org/2001/XMLSchema"/>
-    <ds:schemaRef ds:uri="http://schemas.microsoft.com/office/2006/metadata/properties"/>
-    <ds:schemaRef ds:uri="http://schemas.microsoft.com/sharepoint/v3"/>
-    <ds:schemaRef ds:uri="db90e87a-34a8-49d5-9137-035b9086fbd0"/>
-    <ds:schemaRef ds:uri="http://schemas.microsoft.com/office/2006/documentManagement/types"/>
-    <ds:schemaRef ds:uri="http://schemas.microsoft.com/office/infopath/2007/PartnerControls"/>
-    <ds:schemaRef ds:uri="http://schemas.openxmlformats.org/package/2006/metadata/core-properties"/>
-    <ds:schemaRef ds:uri="http://purl.org/dc/elements/1.1/"/>
-    <ds:schemaRef ds:uri="http://purl.org/dc/terms/"/>
-    <ds:schemaRef ds:uri="http://schemas.microsoft.com/internal/obd"/>
-    <ds:schemaRef ds:uri="http://www.w3.org/2001/XMLSchema-instance"/>
-  </ds:schemaRefs>
-</ds:datastoreItem>
 </file>